--- a/assets/Template_Autoconocimiento 2.0 (completo).pptx
+++ b/assets/Template_Autoconocimiento 2.0 (completo).pptx
@@ -2,7 +2,7 @@
 <file path=ppt/presentation.xml><?xml version="1.0" encoding="utf-8"?>
 <p:presentation xmlns:a="http://schemas.openxmlformats.org/drawingml/2006/main" xmlns:r="http://schemas.openxmlformats.org/officeDocument/2006/relationships" xmlns:p="http://schemas.openxmlformats.org/presentationml/2006/main" strictFirstAndLastChars="0" embedTrueTypeFonts="1" saveSubsetFonts="1" autoCompressPictures="0">
   <p:sldMasterIdLst>
-    <p:sldMasterId id="2147483659" r:id="rId1"/>
+    <p:sldMasterId id="2147483660" r:id="rId1"/>
   </p:sldMasterIdLst>
   <p:notesMasterIdLst>
     <p:notesMasterId r:id="rId44"/>
@@ -336,88 +336,42 @@
 </p:presentation>
 </file>
 
-<file path=ppt/revisionInfo.xml><?xml version="1.0" encoding="utf-8"?>
-<p1510:revInfo xmlns:a="http://schemas.openxmlformats.org/drawingml/2006/main" xmlns:r="http://schemas.openxmlformats.org/officeDocument/2006/relationships" xmlns:p1510="http://schemas.microsoft.com/office/powerpoint/2015/10/main">
-  <p1510:revLst>
-    <p1510:client id="{67671CBF-9D2F-4EE0-B51A-F32980B91AFD}" v="2" dt="2026-03-02T18:32:38.589"/>
-  </p1510:revLst>
-</p1510:revInfo>
-</file>
-
 <file path=ppt/changesInfos/changesInfo1.xml><?xml version="1.0" encoding="utf-8"?>
 <pc:chgInfo xmlns:a="http://schemas.openxmlformats.org/drawingml/2006/main" xmlns:r="http://schemas.openxmlformats.org/officeDocument/2006/relationships" xmlns:ac="http://schemas.microsoft.com/office/drawing/2013/main/command" xmlns:pc="http://schemas.microsoft.com/office/powerpoint/2013/main/command">
   <pc:docChgLst>
     <pc:chgData name="juani vila bach" userId="140d79d91c36b714" providerId="LiveId" clId="{681BBBA0-CB6B-4408-8383-25A2ECA50787}"/>
-    <pc:docChg chg="custSel modSld">
-      <pc:chgData name="juani vila bach" userId="140d79d91c36b714" providerId="LiveId" clId="{681BBBA0-CB6B-4408-8383-25A2ECA50787}" dt="2026-03-02T22:42:58.326" v="117" actId="115"/>
+    <pc:docChg chg="modSld">
+      <pc:chgData name="juani vila bach" userId="140d79d91c36b714" providerId="LiveId" clId="{681BBBA0-CB6B-4408-8383-25A2ECA50787}" dt="2026-03-26T15:07:14.701" v="3" actId="1076"/>
       <pc:docMkLst>
         <pc:docMk/>
       </pc:docMkLst>
       <pc:sldChg chg="modSp mod">
-        <pc:chgData name="juani vila bach" userId="140d79d91c36b714" providerId="LiveId" clId="{681BBBA0-CB6B-4408-8383-25A2ECA50787}" dt="2026-03-02T19:07:30.568" v="111" actId="20577"/>
+        <pc:chgData name="juani vila bach" userId="140d79d91c36b714" providerId="LiveId" clId="{681BBBA0-CB6B-4408-8383-25A2ECA50787}" dt="2026-03-26T15:06:36.793" v="2" actId="20577"/>
         <pc:sldMkLst>
           <pc:docMk/>
           <pc:sldMk cId="0" sldId="281"/>
         </pc:sldMkLst>
         <pc:spChg chg="mod">
-          <ac:chgData name="juani vila bach" userId="140d79d91c36b714" providerId="LiveId" clId="{681BBBA0-CB6B-4408-8383-25A2ECA50787}" dt="2026-03-02T19:07:30.568" v="111" actId="20577"/>
+          <ac:chgData name="juani vila bach" userId="140d79d91c36b714" providerId="LiveId" clId="{681BBBA0-CB6B-4408-8383-25A2ECA50787}" dt="2026-03-26T15:06:36.793" v="2" actId="20577"/>
           <ac:spMkLst>
             <pc:docMk/>
             <pc:sldMk cId="0" sldId="281"/>
-            <ac:spMk id="248" creationId="{00000000-0000-0000-0000-000000000000}"/>
+            <ac:spMk id="253" creationId="{00000000-0000-0000-0000-000000000000}"/>
           </ac:spMkLst>
         </pc:spChg>
       </pc:sldChg>
       <pc:sldChg chg="modSp mod">
-        <pc:chgData name="juani vila bach" userId="140d79d91c36b714" providerId="LiveId" clId="{681BBBA0-CB6B-4408-8383-25A2ECA50787}" dt="2026-03-02T18:31:10.080" v="48" actId="27636"/>
+        <pc:chgData name="juani vila bach" userId="140d79d91c36b714" providerId="LiveId" clId="{681BBBA0-CB6B-4408-8383-25A2ECA50787}" dt="2026-03-26T15:07:14.701" v="3" actId="1076"/>
         <pc:sldMkLst>
           <pc:docMk/>
-          <pc:sldMk cId="0" sldId="292"/>
+          <pc:sldMk cId="0" sldId="285"/>
         </pc:sldMkLst>
         <pc:spChg chg="mod">
-          <ac:chgData name="juani vila bach" userId="140d79d91c36b714" providerId="LiveId" clId="{681BBBA0-CB6B-4408-8383-25A2ECA50787}" dt="2026-03-02T18:31:10.080" v="48" actId="27636"/>
+          <ac:chgData name="juani vila bach" userId="140d79d91c36b714" providerId="LiveId" clId="{681BBBA0-CB6B-4408-8383-25A2ECA50787}" dt="2026-03-26T15:07:14.701" v="3" actId="1076"/>
           <ac:spMkLst>
             <pc:docMk/>
-            <pc:sldMk cId="0" sldId="292"/>
-            <ac:spMk id="329" creationId="{00000000-0000-0000-0000-000000000000}"/>
-          </ac:spMkLst>
-        </pc:spChg>
-      </pc:sldChg>
-      <pc:sldChg chg="modSp mod">
-        <pc:chgData name="juani vila bach" userId="140d79d91c36b714" providerId="LiveId" clId="{681BBBA0-CB6B-4408-8383-25A2ECA50787}" dt="2026-03-02T18:31:10.099" v="50" actId="27636"/>
-        <pc:sldMkLst>
-          <pc:docMk/>
-          <pc:sldMk cId="0" sldId="293"/>
-        </pc:sldMkLst>
-        <pc:spChg chg="mod">
-          <ac:chgData name="juani vila bach" userId="140d79d91c36b714" providerId="LiveId" clId="{681BBBA0-CB6B-4408-8383-25A2ECA50787}" dt="2026-03-02T18:31:10.099" v="50" actId="27636"/>
-          <ac:spMkLst>
-            <pc:docMk/>
-            <pc:sldMk cId="0" sldId="293"/>
-            <ac:spMk id="338" creationId="{00000000-0000-0000-0000-000000000000}"/>
-          </ac:spMkLst>
-        </pc:spChg>
-        <pc:spChg chg="mod">
-          <ac:chgData name="juani vila bach" userId="140d79d91c36b714" providerId="LiveId" clId="{681BBBA0-CB6B-4408-8383-25A2ECA50787}" dt="2026-03-02T18:31:10.099" v="49" actId="27636"/>
-          <ac:spMkLst>
-            <pc:docMk/>
-            <pc:sldMk cId="0" sldId="293"/>
-            <ac:spMk id="339" creationId="{00000000-0000-0000-0000-000000000000}"/>
-          </ac:spMkLst>
-        </pc:spChg>
-      </pc:sldChg>
-      <pc:sldChg chg="modSp mod">
-        <pc:chgData name="juani vila bach" userId="140d79d91c36b714" providerId="LiveId" clId="{681BBBA0-CB6B-4408-8383-25A2ECA50787}" dt="2026-03-02T22:42:58.326" v="117" actId="115"/>
-        <pc:sldMkLst>
-          <pc:docMk/>
-          <pc:sldMk cId="0" sldId="297"/>
-        </pc:sldMkLst>
-        <pc:spChg chg="mod">
-          <ac:chgData name="juani vila bach" userId="140d79d91c36b714" providerId="LiveId" clId="{681BBBA0-CB6B-4408-8383-25A2ECA50787}" dt="2026-03-02T22:42:58.326" v="117" actId="115"/>
-          <ac:spMkLst>
-            <pc:docMk/>
-            <pc:sldMk cId="0" sldId="297"/>
-            <ac:spMk id="358" creationId="{00000000-0000-0000-0000-000000000000}"/>
+            <pc:sldMk cId="0" sldId="285"/>
+            <ac:spMk id="292" creationId="{00000000-0000-0000-0000-000000000000}"/>
           </ac:spMkLst>
         </pc:spChg>
       </pc:sldChg>
@@ -872,7 +826,7 @@
   <p:cSld>
     <p:spTree>
       <p:nvGrpSpPr>
-        <p:cNvPr id="1" name="Shape 50"/>
+        <p:cNvPr id="1" name="Shape 54"/>
         <p:cNvGrpSpPr/>
         <p:nvPr/>
       </p:nvGrpSpPr>
@@ -886,7 +840,7 @@
       </p:grpSpPr>
       <p:sp>
         <p:nvSpPr>
-          <p:cNvPr id="51" name="Google Shape;51;p:notes"/>
+          <p:cNvPr id="55" name="Google Shape;55;p:notes"/>
           <p:cNvSpPr>
             <a:spLocks noGrp="1" noRot="1" noChangeAspect="1"/>
           </p:cNvSpPr>
@@ -927,7 +881,7 @@
       </p:sp>
       <p:sp>
         <p:nvSpPr>
-          <p:cNvPr id="52" name="Google Shape;52;p:notes"/>
+          <p:cNvPr id="56" name="Google Shape;56;p:notes"/>
           <p:cNvSpPr txBox="1">
             <a:spLocks noGrp="1"/>
           </p:cNvSpPr>
@@ -976,7 +930,7 @@
   <p:cSld>
     <p:spTree>
       <p:nvGrpSpPr>
-        <p:cNvPr id="1" name="Shape 131"/>
+        <p:cNvPr id="1" name="Shape 129"/>
         <p:cNvGrpSpPr/>
         <p:nvPr/>
       </p:nvGrpSpPr>
@@ -990,7 +944,7 @@
       </p:grpSpPr>
       <p:sp>
         <p:nvSpPr>
-          <p:cNvPr id="132" name="Google Shape;132;g364e706d103_0_5:notes"/>
+          <p:cNvPr id="130" name="Google Shape;130;g364e706d103_0_5:notes"/>
           <p:cNvSpPr>
             <a:spLocks noGrp="1" noRot="1" noChangeAspect="1"/>
           </p:cNvSpPr>
@@ -1031,7 +985,7 @@
       </p:sp>
       <p:sp>
         <p:nvSpPr>
-          <p:cNvPr id="133" name="Google Shape;133;g364e706d103_0_5:notes"/>
+          <p:cNvPr id="131" name="Google Shape;131;g364e706d103_0_5:notes"/>
           <p:cNvSpPr txBox="1">
             <a:spLocks noGrp="1"/>
           </p:cNvSpPr>
@@ -1080,7 +1034,7 @@
   <p:cSld>
     <p:spTree>
       <p:nvGrpSpPr>
-        <p:cNvPr id="1" name="Shape 139"/>
+        <p:cNvPr id="1" name="Shape 137"/>
         <p:cNvGrpSpPr/>
         <p:nvPr/>
       </p:nvGrpSpPr>
@@ -1094,7 +1048,7 @@
       </p:grpSpPr>
       <p:sp>
         <p:nvSpPr>
-          <p:cNvPr id="140" name="Google Shape;140;g376936d1eaf_0_18:notes"/>
+          <p:cNvPr id="138" name="Google Shape;138;g376936d1eaf_0_18:notes"/>
           <p:cNvSpPr>
             <a:spLocks noGrp="1" noRot="1" noChangeAspect="1"/>
           </p:cNvSpPr>
@@ -1135,7 +1089,7 @@
       </p:sp>
       <p:sp>
         <p:nvSpPr>
-          <p:cNvPr id="141" name="Google Shape;141;g376936d1eaf_0_18:notes"/>
+          <p:cNvPr id="139" name="Google Shape;139;g376936d1eaf_0_18:notes"/>
           <p:cNvSpPr txBox="1">
             <a:spLocks noGrp="1"/>
           </p:cNvSpPr>
@@ -1184,7 +1138,7 @@
   <p:cSld>
     <p:spTree>
       <p:nvGrpSpPr>
-        <p:cNvPr id="1" name="Shape 143"/>
+        <p:cNvPr id="1" name="Shape 141"/>
         <p:cNvGrpSpPr/>
         <p:nvPr/>
       </p:nvGrpSpPr>
@@ -1198,7 +1152,7 @@
       </p:grpSpPr>
       <p:sp>
         <p:nvSpPr>
-          <p:cNvPr id="144" name="Google Shape;144;g376936d1eaf_0_21:notes"/>
+          <p:cNvPr id="142" name="Google Shape;142;g376936d1eaf_0_21:notes"/>
           <p:cNvSpPr>
             <a:spLocks noGrp="1" noRot="1" noChangeAspect="1"/>
           </p:cNvSpPr>
@@ -1239,7 +1193,7 @@
       </p:sp>
       <p:sp>
         <p:nvSpPr>
-          <p:cNvPr id="145" name="Google Shape;145;g376936d1eaf_0_21:notes"/>
+          <p:cNvPr id="143" name="Google Shape;143;g376936d1eaf_0_21:notes"/>
           <p:cNvSpPr txBox="1">
             <a:spLocks noGrp="1"/>
           </p:cNvSpPr>
@@ -1288,7 +1242,7 @@
   <p:cSld>
     <p:spTree>
       <p:nvGrpSpPr>
-        <p:cNvPr id="1" name="Shape 148"/>
+        <p:cNvPr id="1" name="Shape 146"/>
         <p:cNvGrpSpPr/>
         <p:nvPr/>
       </p:nvGrpSpPr>
@@ -1302,7 +1256,45 @@
       </p:grpSpPr>
       <p:sp>
         <p:nvSpPr>
-          <p:cNvPr id="149" name="Google Shape;149;g376936d1eaf_0_24:notes"/>
+          <p:cNvPr id="147" name="Google Shape;147;g3d7eb2d293a_2_1:notes"/>
+          <p:cNvSpPr txBox="1">
+            <a:spLocks noGrp="1"/>
+          </p:cNvSpPr>
+          <p:nvPr>
+            <p:ph type="body" idx="1"/>
+          </p:nvPr>
+        </p:nvSpPr>
+        <p:spPr>
+          <a:xfrm>
+            <a:off x="685800" y="4343390"/>
+            <a:ext cx="5486400" cy="4114800"/>
+          </a:xfrm>
+          <a:prstGeom prst="rect">
+            <a:avLst/>
+          </a:prstGeom>
+        </p:spPr>
+        <p:txBody>
+          <a:bodyPr spcFirstLastPara="1" wrap="square" lIns="91425" tIns="91425" rIns="91425" bIns="91425" anchor="t" anchorCtr="0">
+            <a:noAutofit/>
+          </a:bodyPr>
+          <a:lstStyle/>
+          <a:p>
+            <a:pPr marL="0" lvl="0" indent="0" algn="l" rtl="0">
+              <a:spcBef>
+                <a:spcPts val="0"/>
+              </a:spcBef>
+              <a:spcAft>
+                <a:spcPts val="0"/>
+              </a:spcAft>
+              <a:buNone/>
+            </a:pPr>
+            <a:endParaRPr/>
+          </a:p>
+        </p:txBody>
+      </p:sp>
+      <p:sp>
+        <p:nvSpPr>
+          <p:cNvPr id="148" name="Google Shape;148;g3d7eb2d293a_2_1:notes"/>
           <p:cNvSpPr>
             <a:spLocks noGrp="1" noRot="1" noChangeAspect="1"/>
           </p:cNvSpPr>
@@ -1312,8 +1304,8 @@
         </p:nvSpPr>
         <p:spPr>
           <a:xfrm>
-            <a:off x="2464919" y="685800"/>
-            <a:ext cx="1928700" cy="3429000"/>
+            <a:off x="856153" y="685797"/>
+            <a:ext cx="3429300" cy="3429000"/>
           </a:xfrm>
           <a:custGeom>
             <a:avLst/>
@@ -1341,44 +1333,6 @@
           </a:custGeom>
         </p:spPr>
       </p:sp>
-      <p:sp>
-        <p:nvSpPr>
-          <p:cNvPr id="150" name="Google Shape;150;g376936d1eaf_0_24:notes"/>
-          <p:cNvSpPr txBox="1">
-            <a:spLocks noGrp="1"/>
-          </p:cNvSpPr>
-          <p:nvPr>
-            <p:ph type="body" idx="1"/>
-          </p:nvPr>
-        </p:nvSpPr>
-        <p:spPr>
-          <a:xfrm>
-            <a:off x="685800" y="4343400"/>
-            <a:ext cx="5486400" cy="4114800"/>
-          </a:xfrm>
-          <a:prstGeom prst="rect">
-            <a:avLst/>
-          </a:prstGeom>
-        </p:spPr>
-        <p:txBody>
-          <a:bodyPr spcFirstLastPara="1" wrap="square" lIns="91425" tIns="91425" rIns="91425" bIns="91425" anchor="t" anchorCtr="0">
-            <a:noAutofit/>
-          </a:bodyPr>
-          <a:lstStyle/>
-          <a:p>
-            <a:pPr marL="0" lvl="0" indent="0" algn="l" rtl="0">
-              <a:spcBef>
-                <a:spcPts val="0"/>
-              </a:spcBef>
-              <a:spcAft>
-                <a:spcPts val="0"/>
-              </a:spcAft>
-              <a:buNone/>
-            </a:pPr>
-            <a:endParaRPr/>
-          </a:p>
-        </p:txBody>
-      </p:sp>
     </p:spTree>
   </p:cSld>
   <p:clrMapOvr>
@@ -1392,7 +1346,7 @@
   <p:cSld>
     <p:spTree>
       <p:nvGrpSpPr>
-        <p:cNvPr id="1" name="Shape 153"/>
+        <p:cNvPr id="1" name="Shape 158"/>
         <p:cNvGrpSpPr/>
         <p:nvPr/>
       </p:nvGrpSpPr>
@@ -1406,7 +1360,7 @@
       </p:grpSpPr>
       <p:sp>
         <p:nvSpPr>
-          <p:cNvPr id="154" name="Google Shape;154;g376936d1eaf_0_27:notes"/>
+          <p:cNvPr id="159" name="Google Shape;159;g376936d1eaf_0_27:notes"/>
           <p:cNvSpPr>
             <a:spLocks noGrp="1" noRot="1" noChangeAspect="1"/>
           </p:cNvSpPr>
@@ -1447,7 +1401,7 @@
       </p:sp>
       <p:sp>
         <p:nvSpPr>
-          <p:cNvPr id="155" name="Google Shape;155;g376936d1eaf_0_27:notes"/>
+          <p:cNvPr id="160" name="Google Shape;160;g376936d1eaf_0_27:notes"/>
           <p:cNvSpPr txBox="1">
             <a:spLocks noGrp="1"/>
           </p:cNvSpPr>
@@ -1496,7 +1450,7 @@
   <p:cSld>
     <p:spTree>
       <p:nvGrpSpPr>
-        <p:cNvPr id="1" name="Shape 159"/>
+        <p:cNvPr id="1" name="Shape 164"/>
         <p:cNvGrpSpPr/>
         <p:nvPr/>
       </p:nvGrpSpPr>
@@ -1510,7 +1464,7 @@
       </p:grpSpPr>
       <p:sp>
         <p:nvSpPr>
-          <p:cNvPr id="160" name="Google Shape;160;g376936d1eaf_0_30:notes"/>
+          <p:cNvPr id="165" name="Google Shape;165;g376936d1eaf_0_30:notes"/>
           <p:cNvSpPr>
             <a:spLocks noGrp="1" noRot="1" noChangeAspect="1"/>
           </p:cNvSpPr>
@@ -1551,7 +1505,7 @@
       </p:sp>
       <p:sp>
         <p:nvSpPr>
-          <p:cNvPr id="161" name="Google Shape;161;g376936d1eaf_0_30:notes"/>
+          <p:cNvPr id="166" name="Google Shape;166;g376936d1eaf_0_30:notes"/>
           <p:cNvSpPr txBox="1">
             <a:spLocks noGrp="1"/>
           </p:cNvSpPr>
@@ -1600,7 +1554,7 @@
   <p:cSld>
     <p:spTree>
       <p:nvGrpSpPr>
-        <p:cNvPr id="1" name="Shape 165"/>
+        <p:cNvPr id="1" name="Shape 170"/>
         <p:cNvGrpSpPr/>
         <p:nvPr/>
       </p:nvGrpSpPr>
@@ -1614,7 +1568,7 @@
       </p:grpSpPr>
       <p:sp>
         <p:nvSpPr>
-          <p:cNvPr id="166" name="Google Shape;166;g376936d1eaf_0_33:notes"/>
+          <p:cNvPr id="171" name="Google Shape;171;g376936d1eaf_0_33:notes"/>
           <p:cNvSpPr>
             <a:spLocks noGrp="1" noRot="1" noChangeAspect="1"/>
           </p:cNvSpPr>
@@ -1655,7 +1609,7 @@
       </p:sp>
       <p:sp>
         <p:nvSpPr>
-          <p:cNvPr id="167" name="Google Shape;167;g376936d1eaf_0_33:notes"/>
+          <p:cNvPr id="172" name="Google Shape;172;g376936d1eaf_0_33:notes"/>
           <p:cNvSpPr txBox="1">
             <a:spLocks noGrp="1"/>
           </p:cNvSpPr>
@@ -1704,7 +1658,7 @@
   <p:cSld>
     <p:spTree>
       <p:nvGrpSpPr>
-        <p:cNvPr id="1" name="Shape 171"/>
+        <p:cNvPr id="1" name="Shape 176"/>
         <p:cNvGrpSpPr/>
         <p:nvPr/>
       </p:nvGrpSpPr>
@@ -1718,7 +1672,7 @@
       </p:grpSpPr>
       <p:sp>
         <p:nvSpPr>
-          <p:cNvPr id="172" name="Google Shape;172;g376936d1eaf_0_36:notes"/>
+          <p:cNvPr id="177" name="Google Shape;177;g376936d1eaf_0_36:notes"/>
           <p:cNvSpPr>
             <a:spLocks noGrp="1" noRot="1" noChangeAspect="1"/>
           </p:cNvSpPr>
@@ -1759,7 +1713,7 @@
       </p:sp>
       <p:sp>
         <p:nvSpPr>
-          <p:cNvPr id="173" name="Google Shape;173;g376936d1eaf_0_36:notes"/>
+          <p:cNvPr id="178" name="Google Shape;178;g376936d1eaf_0_36:notes"/>
           <p:cNvSpPr txBox="1">
             <a:spLocks noGrp="1"/>
           </p:cNvSpPr>
@@ -1808,7 +1762,7 @@
   <p:cSld>
     <p:spTree>
       <p:nvGrpSpPr>
-        <p:cNvPr id="1" name="Shape 178"/>
+        <p:cNvPr id="1" name="Shape 183"/>
         <p:cNvGrpSpPr/>
         <p:nvPr/>
       </p:nvGrpSpPr>
@@ -1822,7 +1776,7 @@
       </p:grpSpPr>
       <p:sp>
         <p:nvSpPr>
-          <p:cNvPr id="179" name="Google Shape;179;g376936d1eaf_0_39:notes"/>
+          <p:cNvPr id="184" name="Google Shape;184;g376936d1eaf_0_39:notes"/>
           <p:cNvSpPr>
             <a:spLocks noGrp="1" noRot="1" noChangeAspect="1"/>
           </p:cNvSpPr>
@@ -1863,7 +1817,7 @@
       </p:sp>
       <p:sp>
         <p:nvSpPr>
-          <p:cNvPr id="180" name="Google Shape;180;g376936d1eaf_0_39:notes"/>
+          <p:cNvPr id="185" name="Google Shape;185;g376936d1eaf_0_39:notes"/>
           <p:cNvSpPr txBox="1">
             <a:spLocks noGrp="1"/>
           </p:cNvSpPr>
@@ -1912,7 +1866,7 @@
   <p:cSld>
     <p:spTree>
       <p:nvGrpSpPr>
-        <p:cNvPr id="1" name="Shape 184"/>
+        <p:cNvPr id="1" name="Shape 189"/>
         <p:cNvGrpSpPr/>
         <p:nvPr/>
       </p:nvGrpSpPr>
@@ -1926,7 +1880,7 @@
       </p:grpSpPr>
       <p:sp>
         <p:nvSpPr>
-          <p:cNvPr id="185" name="Google Shape;185;g376936d1eaf_0_42:notes"/>
+          <p:cNvPr id="190" name="Google Shape;190;g376936d1eaf_0_42:notes"/>
           <p:cNvSpPr>
             <a:spLocks noGrp="1" noRot="1" noChangeAspect="1"/>
           </p:cNvSpPr>
@@ -1967,7 +1921,7 @@
       </p:sp>
       <p:sp>
         <p:nvSpPr>
-          <p:cNvPr id="186" name="Google Shape;186;g376936d1eaf_0_42:notes"/>
+          <p:cNvPr id="191" name="Google Shape;191;g376936d1eaf_0_42:notes"/>
           <p:cNvSpPr txBox="1">
             <a:spLocks noGrp="1"/>
           </p:cNvSpPr>
@@ -2016,7 +1970,7 @@
   <p:cSld>
     <p:spTree>
       <p:nvGrpSpPr>
-        <p:cNvPr id="1" name="Shape 55"/>
+        <p:cNvPr id="1" name="Shape 59"/>
         <p:cNvGrpSpPr/>
         <p:nvPr/>
       </p:nvGrpSpPr>
@@ -2030,7 +1984,7 @@
       </p:grpSpPr>
       <p:sp>
         <p:nvSpPr>
-          <p:cNvPr id="56" name="Google Shape;56;g376936d1eaf_0_0:notes"/>
+          <p:cNvPr id="60" name="Google Shape;60;g376936d1eaf_0_0:notes"/>
           <p:cNvSpPr>
             <a:spLocks noGrp="1" noRot="1" noChangeAspect="1"/>
           </p:cNvSpPr>
@@ -2071,7 +2025,7 @@
       </p:sp>
       <p:sp>
         <p:nvSpPr>
-          <p:cNvPr id="57" name="Google Shape;57;g376936d1eaf_0_0:notes"/>
+          <p:cNvPr id="61" name="Google Shape;61;g376936d1eaf_0_0:notes"/>
           <p:cNvSpPr txBox="1">
             <a:spLocks noGrp="1"/>
           </p:cNvSpPr>
@@ -2120,7 +2074,7 @@
   <p:cSld>
     <p:spTree>
       <p:nvGrpSpPr>
-        <p:cNvPr id="1" name="Shape 190"/>
+        <p:cNvPr id="1" name="Shape 195"/>
         <p:cNvGrpSpPr/>
         <p:nvPr/>
       </p:nvGrpSpPr>
@@ -2134,7 +2088,7 @@
       </p:grpSpPr>
       <p:sp>
         <p:nvSpPr>
-          <p:cNvPr id="191" name="Google Shape;191;g376936d1eaf_0_45:notes"/>
+          <p:cNvPr id="196" name="Google Shape;196;g376936d1eaf_0_45:notes"/>
           <p:cNvSpPr>
             <a:spLocks noGrp="1" noRot="1" noChangeAspect="1"/>
           </p:cNvSpPr>
@@ -2175,7 +2129,7 @@
       </p:sp>
       <p:sp>
         <p:nvSpPr>
-          <p:cNvPr id="192" name="Google Shape;192;g376936d1eaf_0_45:notes"/>
+          <p:cNvPr id="197" name="Google Shape;197;g376936d1eaf_0_45:notes"/>
           <p:cNvSpPr txBox="1">
             <a:spLocks noGrp="1"/>
           </p:cNvSpPr>
@@ -2224,7 +2178,7 @@
   <p:cSld>
     <p:spTree>
       <p:nvGrpSpPr>
-        <p:cNvPr id="1" name="Shape 196"/>
+        <p:cNvPr id="1" name="Shape 201"/>
         <p:cNvGrpSpPr/>
         <p:nvPr/>
       </p:nvGrpSpPr>
@@ -2238,7 +2192,7 @@
       </p:grpSpPr>
       <p:sp>
         <p:nvSpPr>
-          <p:cNvPr id="197" name="Google Shape;197;g376936d1eaf_0_51:notes"/>
+          <p:cNvPr id="202" name="Google Shape;202;g376936d1eaf_0_51:notes"/>
           <p:cNvSpPr>
             <a:spLocks noGrp="1" noRot="1" noChangeAspect="1"/>
           </p:cNvSpPr>
@@ -2279,7 +2233,7 @@
       </p:sp>
       <p:sp>
         <p:nvSpPr>
-          <p:cNvPr id="198" name="Google Shape;198;g376936d1eaf_0_51:notes"/>
+          <p:cNvPr id="203" name="Google Shape;203;g376936d1eaf_0_51:notes"/>
           <p:cNvSpPr txBox="1">
             <a:spLocks noGrp="1"/>
           </p:cNvSpPr>
@@ -2328,7 +2282,7 @@
   <p:cSld>
     <p:spTree>
       <p:nvGrpSpPr>
-        <p:cNvPr id="1" name="Shape 200"/>
+        <p:cNvPr id="1" name="Shape 205"/>
         <p:cNvGrpSpPr/>
         <p:nvPr/>
       </p:nvGrpSpPr>
@@ -2342,7 +2296,7 @@
       </p:grpSpPr>
       <p:sp>
         <p:nvSpPr>
-          <p:cNvPr id="201" name="Google Shape;201;g376936d1eaf_0_54:notes"/>
+          <p:cNvPr id="206" name="Google Shape;206;g376936d1eaf_0_54:notes"/>
           <p:cNvSpPr>
             <a:spLocks noGrp="1" noRot="1" noChangeAspect="1"/>
           </p:cNvSpPr>
@@ -2383,7 +2337,7 @@
       </p:sp>
       <p:sp>
         <p:nvSpPr>
-          <p:cNvPr id="202" name="Google Shape;202;g376936d1eaf_0_54:notes"/>
+          <p:cNvPr id="207" name="Google Shape;207;g376936d1eaf_0_54:notes"/>
           <p:cNvSpPr txBox="1">
             <a:spLocks noGrp="1"/>
           </p:cNvSpPr>
@@ -2432,7 +2386,7 @@
   <p:cSld>
     <p:spTree>
       <p:nvGrpSpPr>
-        <p:cNvPr id="1" name="Shape 206"/>
+        <p:cNvPr id="1" name="Shape 211"/>
         <p:cNvGrpSpPr/>
         <p:nvPr/>
       </p:nvGrpSpPr>
@@ -2446,7 +2400,7 @@
       </p:grpSpPr>
       <p:sp>
         <p:nvSpPr>
-          <p:cNvPr id="207" name="Google Shape;207;g376936d1eaf_0_57:notes"/>
+          <p:cNvPr id="212" name="Google Shape;212;g376936d1eaf_0_57:notes"/>
           <p:cNvSpPr>
             <a:spLocks noGrp="1" noRot="1" noChangeAspect="1"/>
           </p:cNvSpPr>
@@ -2487,7 +2441,7 @@
       </p:sp>
       <p:sp>
         <p:nvSpPr>
-          <p:cNvPr id="208" name="Google Shape;208;g376936d1eaf_0_57:notes"/>
+          <p:cNvPr id="213" name="Google Shape;213;g376936d1eaf_0_57:notes"/>
           <p:cNvSpPr txBox="1">
             <a:spLocks noGrp="1"/>
           </p:cNvSpPr>
@@ -2536,7 +2490,7 @@
   <p:cSld>
     <p:spTree>
       <p:nvGrpSpPr>
-        <p:cNvPr id="1" name="Shape 211"/>
+        <p:cNvPr id="1" name="Shape 216"/>
         <p:cNvGrpSpPr/>
         <p:nvPr/>
       </p:nvGrpSpPr>
@@ -2550,7 +2504,7 @@
       </p:grpSpPr>
       <p:sp>
         <p:nvSpPr>
-          <p:cNvPr id="212" name="Google Shape;212;g376936d1eaf_0_60:notes"/>
+          <p:cNvPr id="217" name="Google Shape;217;g376936d1eaf_0_60:notes"/>
           <p:cNvSpPr>
             <a:spLocks noGrp="1" noRot="1" noChangeAspect="1"/>
           </p:cNvSpPr>
@@ -2591,7 +2545,7 @@
       </p:sp>
       <p:sp>
         <p:nvSpPr>
-          <p:cNvPr id="213" name="Google Shape;213;g376936d1eaf_0_60:notes"/>
+          <p:cNvPr id="218" name="Google Shape;218;g376936d1eaf_0_60:notes"/>
           <p:cNvSpPr txBox="1">
             <a:spLocks noGrp="1"/>
           </p:cNvSpPr>
@@ -2640,7 +2594,7 @@
   <p:cSld>
     <p:spTree>
       <p:nvGrpSpPr>
-        <p:cNvPr id="1" name="Shape 215"/>
+        <p:cNvPr id="1" name="Shape 220"/>
         <p:cNvGrpSpPr/>
         <p:nvPr/>
       </p:nvGrpSpPr>
@@ -2654,7 +2608,7 @@
       </p:grpSpPr>
       <p:sp>
         <p:nvSpPr>
-          <p:cNvPr id="216" name="Google Shape;216;g376936d1eaf_0_63:notes"/>
+          <p:cNvPr id="221" name="Google Shape;221;g376936d1eaf_0_63:notes"/>
           <p:cNvSpPr>
             <a:spLocks noGrp="1" noRot="1" noChangeAspect="1"/>
           </p:cNvSpPr>
@@ -2695,7 +2649,7 @@
       </p:sp>
       <p:sp>
         <p:nvSpPr>
-          <p:cNvPr id="217" name="Google Shape;217;g376936d1eaf_0_63:notes"/>
+          <p:cNvPr id="222" name="Google Shape;222;g376936d1eaf_0_63:notes"/>
           <p:cNvSpPr txBox="1">
             <a:spLocks noGrp="1"/>
           </p:cNvSpPr>
@@ -2744,7 +2698,7 @@
   <p:cSld>
     <p:spTree>
       <p:nvGrpSpPr>
-        <p:cNvPr id="1" name="Shape 243"/>
+        <p:cNvPr id="1" name="Shape 248"/>
         <p:cNvGrpSpPr/>
         <p:nvPr/>
       </p:nvGrpSpPr>
@@ -2758,7 +2712,7 @@
       </p:grpSpPr>
       <p:sp>
         <p:nvSpPr>
-          <p:cNvPr id="244" name="Google Shape;244;g376936d1eaf_0_66:notes"/>
+          <p:cNvPr id="249" name="Google Shape;249;g376936d1eaf_0_66:notes"/>
           <p:cNvSpPr>
             <a:spLocks noGrp="1" noRot="1" noChangeAspect="1"/>
           </p:cNvSpPr>
@@ -2799,7 +2753,7 @@
       </p:sp>
       <p:sp>
         <p:nvSpPr>
-          <p:cNvPr id="245" name="Google Shape;245;g376936d1eaf_0_66:notes"/>
+          <p:cNvPr id="250" name="Google Shape;250;g376936d1eaf_0_66:notes"/>
           <p:cNvSpPr txBox="1">
             <a:spLocks noGrp="1"/>
           </p:cNvSpPr>
@@ -2848,7 +2802,7 @@
   <p:cSld>
     <p:spTree>
       <p:nvGrpSpPr>
-        <p:cNvPr id="1" name="Shape 253"/>
+        <p:cNvPr id="1" name="Shape 258"/>
         <p:cNvGrpSpPr/>
         <p:nvPr/>
       </p:nvGrpSpPr>
@@ -2862,7 +2816,7 @@
       </p:grpSpPr>
       <p:sp>
         <p:nvSpPr>
-          <p:cNvPr id="254" name="Google Shape;254;g376936d1eaf_0_108:notes"/>
+          <p:cNvPr id="259" name="Google Shape;259;g376936d1eaf_0_108:notes"/>
           <p:cNvSpPr>
             <a:spLocks noGrp="1" noRot="1" noChangeAspect="1"/>
           </p:cNvSpPr>
@@ -2903,7 +2857,7 @@
       </p:sp>
       <p:sp>
         <p:nvSpPr>
-          <p:cNvPr id="255" name="Google Shape;255;g376936d1eaf_0_108:notes"/>
+          <p:cNvPr id="260" name="Google Shape;260;g376936d1eaf_0_108:notes"/>
           <p:cNvSpPr txBox="1">
             <a:spLocks noGrp="1"/>
           </p:cNvSpPr>
@@ -2952,7 +2906,7 @@
   <p:cSld>
     <p:spTree>
       <p:nvGrpSpPr>
-        <p:cNvPr id="1" name="Shape 263"/>
+        <p:cNvPr id="1" name="Shape 268"/>
         <p:cNvGrpSpPr/>
         <p:nvPr/>
       </p:nvGrpSpPr>
@@ -2966,7 +2920,7 @@
       </p:grpSpPr>
       <p:sp>
         <p:nvSpPr>
-          <p:cNvPr id="264" name="Google Shape;264;g376936d1eaf_0_105:notes"/>
+          <p:cNvPr id="269" name="Google Shape;269;g376936d1eaf_0_105:notes"/>
           <p:cNvSpPr>
             <a:spLocks noGrp="1" noRot="1" noChangeAspect="1"/>
           </p:cNvSpPr>
@@ -3007,7 +2961,7 @@
       </p:sp>
       <p:sp>
         <p:nvSpPr>
-          <p:cNvPr id="265" name="Google Shape;265;g376936d1eaf_0_105:notes"/>
+          <p:cNvPr id="270" name="Google Shape;270;g376936d1eaf_0_105:notes"/>
           <p:cNvSpPr txBox="1">
             <a:spLocks noGrp="1"/>
           </p:cNvSpPr>
@@ -3056,7 +3010,7 @@
   <p:cSld>
     <p:spTree>
       <p:nvGrpSpPr>
-        <p:cNvPr id="1" name="Shape 273"/>
+        <p:cNvPr id="1" name="Shape 278"/>
         <p:cNvGrpSpPr/>
         <p:nvPr/>
       </p:nvGrpSpPr>
@@ -3070,7 +3024,7 @@
       </p:grpSpPr>
       <p:sp>
         <p:nvSpPr>
-          <p:cNvPr id="274" name="Google Shape;274;g376936d1eaf_0_102:notes"/>
+          <p:cNvPr id="279" name="Google Shape;279;g376936d1eaf_0_102:notes"/>
           <p:cNvSpPr>
             <a:spLocks noGrp="1" noRot="1" noChangeAspect="1"/>
           </p:cNvSpPr>
@@ -3111,7 +3065,7 @@
       </p:sp>
       <p:sp>
         <p:nvSpPr>
-          <p:cNvPr id="275" name="Google Shape;275;g376936d1eaf_0_102:notes"/>
+          <p:cNvPr id="280" name="Google Shape;280;g376936d1eaf_0_102:notes"/>
           <p:cNvSpPr txBox="1">
             <a:spLocks noGrp="1"/>
           </p:cNvSpPr>
@@ -3160,7 +3114,7 @@
   <p:cSld>
     <p:spTree>
       <p:nvGrpSpPr>
-        <p:cNvPr id="1" name="Shape 59"/>
+        <p:cNvPr id="1" name="Shape 63"/>
         <p:cNvGrpSpPr/>
         <p:nvPr/>
       </p:nvGrpSpPr>
@@ -3174,7 +3128,7 @@
       </p:grpSpPr>
       <p:sp>
         <p:nvSpPr>
-          <p:cNvPr id="60" name="Google Shape;60;g376936d1eaf_0_3:notes"/>
+          <p:cNvPr id="64" name="Google Shape;64;g376936d1eaf_0_3:notes"/>
           <p:cNvSpPr>
             <a:spLocks noGrp="1" noRot="1" noChangeAspect="1"/>
           </p:cNvSpPr>
@@ -3215,7 +3169,7 @@
       </p:sp>
       <p:sp>
         <p:nvSpPr>
-          <p:cNvPr id="61" name="Google Shape;61;g376936d1eaf_0_3:notes"/>
+          <p:cNvPr id="65" name="Google Shape;65;g376936d1eaf_0_3:notes"/>
           <p:cNvSpPr txBox="1">
             <a:spLocks noGrp="1"/>
           </p:cNvSpPr>
@@ -3264,7 +3218,7 @@
   <p:cSld>
     <p:spTree>
       <p:nvGrpSpPr>
-        <p:cNvPr id="1" name="Shape 283"/>
+        <p:cNvPr id="1" name="Shape 288"/>
         <p:cNvGrpSpPr/>
         <p:nvPr/>
       </p:nvGrpSpPr>
@@ -3278,7 +3232,7 @@
       </p:grpSpPr>
       <p:sp>
         <p:nvSpPr>
-          <p:cNvPr id="284" name="Google Shape;284;g3794dfc6a05_0_9:notes"/>
+          <p:cNvPr id="289" name="Google Shape;289;g3794dfc6a05_0_9:notes"/>
           <p:cNvSpPr>
             <a:spLocks noGrp="1" noRot="1" noChangeAspect="1"/>
           </p:cNvSpPr>
@@ -3288,8 +3242,8 @@
         </p:nvSpPr>
         <p:spPr>
           <a:xfrm>
-            <a:off x="2464919" y="685800"/>
-            <a:ext cx="1928700" cy="3429000"/>
+            <a:off x="2465388" y="685800"/>
+            <a:ext cx="1928812" cy="3429000"/>
           </a:xfrm>
           <a:custGeom>
             <a:avLst/>
@@ -3319,7 +3273,7 @@
       </p:sp>
       <p:sp>
         <p:nvSpPr>
-          <p:cNvPr id="285" name="Google Shape;285;g3794dfc6a05_0_9:notes"/>
+          <p:cNvPr id="290" name="Google Shape;290;g3794dfc6a05_0_9:notes"/>
           <p:cNvSpPr txBox="1">
             <a:spLocks noGrp="1"/>
           </p:cNvSpPr>
@@ -3368,7 +3322,7 @@
   <p:cSld>
     <p:spTree>
       <p:nvGrpSpPr>
-        <p:cNvPr id="1" name="Shape 291"/>
+        <p:cNvPr id="1" name="Shape 296"/>
         <p:cNvGrpSpPr/>
         <p:nvPr/>
       </p:nvGrpSpPr>
@@ -3382,7 +3336,7 @@
       </p:grpSpPr>
       <p:sp>
         <p:nvSpPr>
-          <p:cNvPr id="292" name="Google Shape;292;g3794dfc6a05_0_38:notes"/>
+          <p:cNvPr id="297" name="Google Shape;297;g3794dfc6a05_0_38:notes"/>
           <p:cNvSpPr>
             <a:spLocks noGrp="1" noRot="1" noChangeAspect="1"/>
           </p:cNvSpPr>
@@ -3423,7 +3377,7 @@
       </p:sp>
       <p:sp>
         <p:nvSpPr>
-          <p:cNvPr id="293" name="Google Shape;293;g3794dfc6a05_0_38:notes"/>
+          <p:cNvPr id="298" name="Google Shape;298;g3794dfc6a05_0_38:notes"/>
           <p:cNvSpPr txBox="1">
             <a:spLocks noGrp="1"/>
           </p:cNvSpPr>
@@ -3472,7 +3426,7 @@
   <p:cSld>
     <p:spTree>
       <p:nvGrpSpPr>
-        <p:cNvPr id="1" name="Shape 295"/>
+        <p:cNvPr id="1" name="Shape 300"/>
         <p:cNvGrpSpPr/>
         <p:nvPr/>
       </p:nvGrpSpPr>
@@ -3486,7 +3440,7 @@
       </p:grpSpPr>
       <p:sp>
         <p:nvSpPr>
-          <p:cNvPr id="296" name="Google Shape;296;g3794dfc6a05_0_6:notes"/>
+          <p:cNvPr id="301" name="Google Shape;301;g3794dfc6a05_0_6:notes"/>
           <p:cNvSpPr>
             <a:spLocks noGrp="1" noRot="1" noChangeAspect="1"/>
           </p:cNvSpPr>
@@ -3527,7 +3481,7 @@
       </p:sp>
       <p:sp>
         <p:nvSpPr>
-          <p:cNvPr id="297" name="Google Shape;297;g3794dfc6a05_0_6:notes"/>
+          <p:cNvPr id="302" name="Google Shape;302;g3794dfc6a05_0_6:notes"/>
           <p:cNvSpPr txBox="1">
             <a:spLocks noGrp="1"/>
           </p:cNvSpPr>
@@ -3576,7 +3530,7 @@
   <p:cSld>
     <p:spTree>
       <p:nvGrpSpPr>
-        <p:cNvPr id="1" name="Shape 301"/>
+        <p:cNvPr id="1" name="Shape 306"/>
         <p:cNvGrpSpPr/>
         <p:nvPr/>
       </p:nvGrpSpPr>
@@ -3590,7 +3544,7 @@
       </p:grpSpPr>
       <p:sp>
         <p:nvSpPr>
-          <p:cNvPr id="302" name="Google Shape;302;g3794dfc6a05_0_3:notes"/>
+          <p:cNvPr id="307" name="Google Shape;307;g3794dfc6a05_0_3:notes"/>
           <p:cNvSpPr>
             <a:spLocks noGrp="1" noRot="1" noChangeAspect="1"/>
           </p:cNvSpPr>
@@ -3631,7 +3585,7 @@
       </p:sp>
       <p:sp>
         <p:nvSpPr>
-          <p:cNvPr id="303" name="Google Shape;303;g3794dfc6a05_0_3:notes"/>
+          <p:cNvPr id="308" name="Google Shape;308;g3794dfc6a05_0_3:notes"/>
           <p:cNvSpPr txBox="1">
             <a:spLocks noGrp="1"/>
           </p:cNvSpPr>
@@ -3680,7 +3634,7 @@
   <p:cSld>
     <p:spTree>
       <p:nvGrpSpPr>
-        <p:cNvPr id="1" name="Shape 307"/>
+        <p:cNvPr id="1" name="Shape 312"/>
         <p:cNvGrpSpPr/>
         <p:nvPr/>
       </p:nvGrpSpPr>
@@ -3694,7 +3648,7 @@
       </p:grpSpPr>
       <p:sp>
         <p:nvSpPr>
-          <p:cNvPr id="308" name="Google Shape;308;g3794dfc6a05_0_0:notes"/>
+          <p:cNvPr id="313" name="Google Shape;313;g3794dfc6a05_0_0:notes"/>
           <p:cNvSpPr>
             <a:spLocks noGrp="1" noRot="1" noChangeAspect="1"/>
           </p:cNvSpPr>
@@ -3735,7 +3689,7 @@
       </p:sp>
       <p:sp>
         <p:nvSpPr>
-          <p:cNvPr id="309" name="Google Shape;309;g3794dfc6a05_0_0:notes"/>
+          <p:cNvPr id="314" name="Google Shape;314;g3794dfc6a05_0_0:notes"/>
           <p:cNvSpPr txBox="1">
             <a:spLocks noGrp="1"/>
           </p:cNvSpPr>
@@ -3784,7 +3738,7 @@
   <p:cSld>
     <p:spTree>
       <p:nvGrpSpPr>
-        <p:cNvPr id="1" name="Shape 313"/>
+        <p:cNvPr id="1" name="Shape 318"/>
         <p:cNvGrpSpPr/>
         <p:nvPr/>
       </p:nvGrpSpPr>
@@ -3798,7 +3752,7 @@
       </p:grpSpPr>
       <p:sp>
         <p:nvSpPr>
-          <p:cNvPr id="314" name="Google Shape;314;g3794dfc6a05_0_15:notes"/>
+          <p:cNvPr id="319" name="Google Shape;319;g3794dfc6a05_0_15:notes"/>
           <p:cNvSpPr>
             <a:spLocks noGrp="1" noRot="1" noChangeAspect="1"/>
           </p:cNvSpPr>
@@ -3839,7 +3793,7 @@
       </p:sp>
       <p:sp>
         <p:nvSpPr>
-          <p:cNvPr id="315" name="Google Shape;315;g3794dfc6a05_0_15:notes"/>
+          <p:cNvPr id="320" name="Google Shape;320;g3794dfc6a05_0_15:notes"/>
           <p:cNvSpPr txBox="1">
             <a:spLocks noGrp="1"/>
           </p:cNvSpPr>
@@ -3888,7 +3842,7 @@
   <p:cSld>
     <p:spTree>
       <p:nvGrpSpPr>
-        <p:cNvPr id="1" name="Shape 319"/>
+        <p:cNvPr id="1" name="Shape 324"/>
         <p:cNvGrpSpPr/>
         <p:nvPr/>
       </p:nvGrpSpPr>
@@ -3902,7 +3856,7 @@
       </p:grpSpPr>
       <p:sp>
         <p:nvSpPr>
-          <p:cNvPr id="320" name="Google Shape;320;g3794dfc6a05_0_12:notes"/>
+          <p:cNvPr id="325" name="Google Shape;325;g3794dfc6a05_0_12:notes"/>
           <p:cNvSpPr>
             <a:spLocks noGrp="1" noRot="1" noChangeAspect="1"/>
           </p:cNvSpPr>
@@ -3943,7 +3897,7 @@
       </p:sp>
       <p:sp>
         <p:nvSpPr>
-          <p:cNvPr id="321" name="Google Shape;321;g3794dfc6a05_0_12:notes"/>
+          <p:cNvPr id="326" name="Google Shape;326;g3794dfc6a05_0_12:notes"/>
           <p:cNvSpPr txBox="1">
             <a:spLocks noGrp="1"/>
           </p:cNvSpPr>
@@ -3992,7 +3946,7 @@
   <p:cSld>
     <p:spTree>
       <p:nvGrpSpPr>
-        <p:cNvPr id="1" name="Shape 323"/>
+        <p:cNvPr id="1" name="Shape 328"/>
         <p:cNvGrpSpPr/>
         <p:nvPr/>
       </p:nvGrpSpPr>
@@ -4006,7 +3960,7 @@
       </p:grpSpPr>
       <p:sp>
         <p:nvSpPr>
-          <p:cNvPr id="324" name="Google Shape;324;g376936d1eaf_0_72:notes"/>
+          <p:cNvPr id="329" name="Google Shape;329;g376936d1eaf_0_72:notes"/>
           <p:cNvSpPr>
             <a:spLocks noGrp="1" noRot="1" noChangeAspect="1"/>
           </p:cNvSpPr>
@@ -4016,8 +3970,8 @@
         </p:nvSpPr>
         <p:spPr>
           <a:xfrm>
-            <a:off x="2465388" y="685800"/>
-            <a:ext cx="1928812" cy="3429000"/>
+            <a:off x="2464919" y="685800"/>
+            <a:ext cx="1928700" cy="3429000"/>
           </a:xfrm>
           <a:custGeom>
             <a:avLst/>
@@ -4047,7 +4001,7 @@
       </p:sp>
       <p:sp>
         <p:nvSpPr>
-          <p:cNvPr id="325" name="Google Shape;325;g376936d1eaf_0_72:notes"/>
+          <p:cNvPr id="330" name="Google Shape;330;g376936d1eaf_0_72:notes"/>
           <p:cNvSpPr txBox="1">
             <a:spLocks noGrp="1"/>
           </p:cNvSpPr>
@@ -4096,7 +4050,7 @@
   <p:cSld>
     <p:spTree>
       <p:nvGrpSpPr>
-        <p:cNvPr id="1" name="Shape 330"/>
+        <p:cNvPr id="1" name="Shape 335"/>
         <p:cNvGrpSpPr/>
         <p:nvPr/>
       </p:nvGrpSpPr>
@@ -4110,7 +4064,7 @@
       </p:grpSpPr>
       <p:sp>
         <p:nvSpPr>
-          <p:cNvPr id="331" name="Google Shape;331;g376936d1eaf_0_75:notes"/>
+          <p:cNvPr id="336" name="Google Shape;336;g376936d1eaf_0_75:notes"/>
           <p:cNvSpPr>
             <a:spLocks noGrp="1" noRot="1" noChangeAspect="1"/>
           </p:cNvSpPr>
@@ -4120,8 +4074,8 @@
         </p:nvSpPr>
         <p:spPr>
           <a:xfrm>
-            <a:off x="2465388" y="685800"/>
-            <a:ext cx="1928812" cy="3429000"/>
+            <a:off x="2464919" y="685800"/>
+            <a:ext cx="1928700" cy="3429000"/>
           </a:xfrm>
           <a:custGeom>
             <a:avLst/>
@@ -4151,7 +4105,7 @@
       </p:sp>
       <p:sp>
         <p:nvSpPr>
-          <p:cNvPr id="332" name="Google Shape;332;g376936d1eaf_0_75:notes"/>
+          <p:cNvPr id="337" name="Google Shape;337;g376936d1eaf_0_75:notes"/>
           <p:cNvSpPr txBox="1">
             <a:spLocks noGrp="1"/>
           </p:cNvSpPr>
@@ -4200,7 +4154,7 @@
   <p:cSld>
     <p:spTree>
       <p:nvGrpSpPr>
-        <p:cNvPr id="1" name="Shape 340"/>
+        <p:cNvPr id="1" name="Shape 345"/>
         <p:cNvGrpSpPr/>
         <p:nvPr/>
       </p:nvGrpSpPr>
@@ -4214,7 +4168,7 @@
       </p:grpSpPr>
       <p:sp>
         <p:nvSpPr>
-          <p:cNvPr id="341" name="Google Shape;341;g376936d1eaf_0_78:notes"/>
+          <p:cNvPr id="346" name="Google Shape;346;g376936d1eaf_0_78:notes"/>
           <p:cNvSpPr>
             <a:spLocks noGrp="1" noRot="1" noChangeAspect="1"/>
           </p:cNvSpPr>
@@ -4255,7 +4209,7 @@
       </p:sp>
       <p:sp>
         <p:nvSpPr>
-          <p:cNvPr id="342" name="Google Shape;342;g376936d1eaf_0_78:notes"/>
+          <p:cNvPr id="347" name="Google Shape;347;g376936d1eaf_0_78:notes"/>
           <p:cNvSpPr txBox="1">
             <a:spLocks noGrp="1"/>
           </p:cNvSpPr>
@@ -4304,7 +4258,7 @@
   <p:cSld>
     <p:spTree>
       <p:nvGrpSpPr>
-        <p:cNvPr id="1" name="Shape 63"/>
+        <p:cNvPr id="1" name="Shape 67"/>
         <p:cNvGrpSpPr/>
         <p:nvPr/>
       </p:nvGrpSpPr>
@@ -4318,7 +4272,7 @@
       </p:grpSpPr>
       <p:sp>
         <p:nvSpPr>
-          <p:cNvPr id="64" name="Google Shape;64;g376936d1eaf_0_6:notes"/>
+          <p:cNvPr id="68" name="Google Shape;68;g376936d1eaf_0_6:notes"/>
           <p:cNvSpPr>
             <a:spLocks noGrp="1" noRot="1" noChangeAspect="1"/>
           </p:cNvSpPr>
@@ -4359,7 +4313,7 @@
       </p:sp>
       <p:sp>
         <p:nvSpPr>
-          <p:cNvPr id="65" name="Google Shape;65;g376936d1eaf_0_6:notes"/>
+          <p:cNvPr id="69" name="Google Shape;69;g376936d1eaf_0_6:notes"/>
           <p:cNvSpPr txBox="1">
             <a:spLocks noGrp="1"/>
           </p:cNvSpPr>
@@ -4408,7 +4362,7 @@
   <p:cSld>
     <p:spTree>
       <p:nvGrpSpPr>
-        <p:cNvPr id="1" name="Shape 346"/>
+        <p:cNvPr id="1" name="Shape 351"/>
         <p:cNvGrpSpPr/>
         <p:nvPr/>
       </p:nvGrpSpPr>
@@ -4422,7 +4376,7 @@
       </p:grpSpPr>
       <p:sp>
         <p:nvSpPr>
-          <p:cNvPr id="347" name="Google Shape;347;g376936d1eaf_0_81:notes"/>
+          <p:cNvPr id="352" name="Google Shape;352;g376936d1eaf_0_81:notes"/>
           <p:cNvSpPr>
             <a:spLocks noGrp="1" noRot="1" noChangeAspect="1"/>
           </p:cNvSpPr>
@@ -4463,7 +4417,7 @@
       </p:sp>
       <p:sp>
         <p:nvSpPr>
-          <p:cNvPr id="348" name="Google Shape;348;g376936d1eaf_0_81:notes"/>
+          <p:cNvPr id="353" name="Google Shape;353;g376936d1eaf_0_81:notes"/>
           <p:cNvSpPr txBox="1">
             <a:spLocks noGrp="1"/>
           </p:cNvSpPr>
@@ -4512,7 +4466,7 @@
   <p:cSld>
     <p:spTree>
       <p:nvGrpSpPr>
-        <p:cNvPr id="1" name="Shape 350"/>
+        <p:cNvPr id="1" name="Shape 355"/>
         <p:cNvGrpSpPr/>
         <p:nvPr/>
       </p:nvGrpSpPr>
@@ -4526,7 +4480,7 @@
       </p:grpSpPr>
       <p:sp>
         <p:nvSpPr>
-          <p:cNvPr id="351" name="Google Shape;351;g376936d1eaf_0_84:notes"/>
+          <p:cNvPr id="356" name="Google Shape;356;g376936d1eaf_0_84:notes"/>
           <p:cNvSpPr>
             <a:spLocks noGrp="1" noRot="1" noChangeAspect="1"/>
           </p:cNvSpPr>
@@ -4567,7 +4521,7 @@
       </p:sp>
       <p:sp>
         <p:nvSpPr>
-          <p:cNvPr id="352" name="Google Shape;352;g376936d1eaf_0_84:notes"/>
+          <p:cNvPr id="357" name="Google Shape;357;g376936d1eaf_0_84:notes"/>
           <p:cNvSpPr txBox="1">
             <a:spLocks noGrp="1"/>
           </p:cNvSpPr>
@@ -4616,7 +4570,7 @@
   <p:cSld>
     <p:spTree>
       <p:nvGrpSpPr>
-        <p:cNvPr id="1" name="Shape 354"/>
+        <p:cNvPr id="1" name="Shape 359"/>
         <p:cNvGrpSpPr/>
         <p:nvPr/>
       </p:nvGrpSpPr>
@@ -4630,7 +4584,7 @@
       </p:grpSpPr>
       <p:sp>
         <p:nvSpPr>
-          <p:cNvPr id="355" name="Google Shape;355;g3c612a8d095_1_0:notes"/>
+          <p:cNvPr id="360" name="Google Shape;360;g3c5922e5154_0_2:notes"/>
           <p:cNvSpPr>
             <a:spLocks noGrp="1" noRot="1" noChangeAspect="1"/>
           </p:cNvSpPr>
@@ -4641,7 +4595,7 @@
         <p:spPr>
           <a:xfrm>
             <a:off x="2465388" y="685800"/>
-            <a:ext cx="1928812" cy="3429000"/>
+            <a:ext cx="1928700" cy="3429000"/>
           </a:xfrm>
           <a:custGeom>
             <a:avLst/>
@@ -4667,11 +4621,21 @@
               </a:path>
             </a:pathLst>
           </a:custGeom>
-        </p:spPr>
-      </p:sp>
-      <p:sp>
-        <p:nvSpPr>
-          <p:cNvPr id="356" name="Google Shape;356;g3c612a8d095_1_0:notes"/>
+          <a:noFill/>
+          <a:ln w="9525" cap="flat" cmpd="sng">
+            <a:solidFill>
+              <a:srgbClr val="000000"/>
+            </a:solidFill>
+            <a:prstDash val="solid"/>
+            <a:round/>
+            <a:headEnd type="none" w="sm" len="sm"/>
+            <a:tailEnd type="none" w="sm" len="sm"/>
+          </a:ln>
+        </p:spPr>
+      </p:sp>
+      <p:sp>
+        <p:nvSpPr>
+          <p:cNvPr id="361" name="Google Shape;361;g3c5922e5154_0_2:notes"/>
           <p:cNvSpPr txBox="1">
             <a:spLocks noGrp="1"/>
           </p:cNvSpPr>
@@ -4687,6 +4651,10 @@
           <a:prstGeom prst="rect">
             <a:avLst/>
           </a:prstGeom>
+          <a:noFill/>
+          <a:ln>
+            <a:noFill/>
+          </a:ln>
         </p:spPr>
         <p:txBody>
           <a:bodyPr spcFirstLastPara="1" wrap="square" lIns="91425" tIns="91425" rIns="91425" bIns="91425" anchor="t" anchorCtr="0">
@@ -4695,12 +4663,16 @@
           <a:lstStyle/>
           <a:p>
             <a:pPr marL="0" lvl="0" indent="0" algn="l" rtl="0">
-              <a:spcBef>
-                <a:spcPts val="0"/>
-              </a:spcBef>
-              <a:spcAft>
-                <a:spcPts val="0"/>
-              </a:spcAft>
+              <a:lnSpc>
+                <a:spcPct val="100000"/>
+              </a:lnSpc>
+              <a:spcBef>
+                <a:spcPts val="0"/>
+              </a:spcBef>
+              <a:spcAft>
+                <a:spcPts val="0"/>
+              </a:spcAft>
+              <a:buSzPts val="1100"/>
               <a:buNone/>
             </a:pPr>
             <a:endParaRPr/>
@@ -4720,7 +4692,7 @@
   <p:cSld>
     <p:spTree>
       <p:nvGrpSpPr>
-        <p:cNvPr id="1" name="Shape 91"/>
+        <p:cNvPr id="1" name="Shape 89"/>
         <p:cNvGrpSpPr/>
         <p:nvPr/>
       </p:nvGrpSpPr>
@@ -4734,7 +4706,7 @@
       </p:grpSpPr>
       <p:sp>
         <p:nvSpPr>
-          <p:cNvPr id="92" name="Google Shape;92;g376936d1eaf_0_9:notes"/>
+          <p:cNvPr id="90" name="Google Shape;90;g376936d1eaf_0_9:notes"/>
           <p:cNvSpPr>
             <a:spLocks noGrp="1" noRot="1" noChangeAspect="1"/>
           </p:cNvSpPr>
@@ -4775,7 +4747,7 @@
       </p:sp>
       <p:sp>
         <p:nvSpPr>
-          <p:cNvPr id="93" name="Google Shape;93;g376936d1eaf_0_9:notes"/>
+          <p:cNvPr id="91" name="Google Shape;91;g376936d1eaf_0_9:notes"/>
           <p:cNvSpPr txBox="1">
             <a:spLocks noGrp="1"/>
           </p:cNvSpPr>
@@ -4824,7 +4796,7 @@
   <p:cSld>
     <p:spTree>
       <p:nvGrpSpPr>
-        <p:cNvPr id="1" name="Shape 103"/>
+        <p:cNvPr id="1" name="Shape 101"/>
         <p:cNvGrpSpPr/>
         <p:nvPr/>
       </p:nvGrpSpPr>
@@ -4838,7 +4810,7 @@
       </p:grpSpPr>
       <p:sp>
         <p:nvSpPr>
-          <p:cNvPr id="104" name="Google Shape;104;g376936d1eaf_0_12:notes"/>
+          <p:cNvPr id="102" name="Google Shape;102;g376936d1eaf_0_12:notes"/>
           <p:cNvSpPr>
             <a:spLocks noGrp="1" noRot="1" noChangeAspect="1"/>
           </p:cNvSpPr>
@@ -4879,7 +4851,7 @@
       </p:sp>
       <p:sp>
         <p:nvSpPr>
-          <p:cNvPr id="105" name="Google Shape;105;g376936d1eaf_0_12:notes"/>
+          <p:cNvPr id="103" name="Google Shape;103;g376936d1eaf_0_12:notes"/>
           <p:cNvSpPr txBox="1">
             <a:spLocks noGrp="1"/>
           </p:cNvSpPr>
@@ -4928,7 +4900,7 @@
   <p:cSld>
     <p:spTree>
       <p:nvGrpSpPr>
-        <p:cNvPr id="1" name="Shape 107"/>
+        <p:cNvPr id="1" name="Shape 105"/>
         <p:cNvGrpSpPr/>
         <p:nvPr/>
       </p:nvGrpSpPr>
@@ -4942,7 +4914,7 @@
       </p:grpSpPr>
       <p:sp>
         <p:nvSpPr>
-          <p:cNvPr id="108" name="Google Shape;108;g376936d1eaf_0_15:notes"/>
+          <p:cNvPr id="106" name="Google Shape;106;g376936d1eaf_0_15:notes"/>
           <p:cNvSpPr>
             <a:spLocks noGrp="1" noRot="1" noChangeAspect="1"/>
           </p:cNvSpPr>
@@ -4983,7 +4955,7 @@
       </p:sp>
       <p:sp>
         <p:nvSpPr>
-          <p:cNvPr id="109" name="Google Shape;109;g376936d1eaf_0_15:notes"/>
+          <p:cNvPr id="107" name="Google Shape;107;g376936d1eaf_0_15:notes"/>
           <p:cNvSpPr txBox="1">
             <a:spLocks noGrp="1"/>
           </p:cNvSpPr>
@@ -5032,7 +5004,7 @@
   <p:cSld>
     <p:spTree>
       <p:nvGrpSpPr>
-        <p:cNvPr id="1" name="Shape 115"/>
+        <p:cNvPr id="1" name="Shape 113"/>
         <p:cNvGrpSpPr/>
         <p:nvPr/>
       </p:nvGrpSpPr>
@@ -5046,7 +5018,7 @@
       </p:grpSpPr>
       <p:sp>
         <p:nvSpPr>
-          <p:cNvPr id="116" name="Google Shape;116;g364e706d103_0_12:notes"/>
+          <p:cNvPr id="114" name="Google Shape;114;g364e706d103_0_12:notes"/>
           <p:cNvSpPr>
             <a:spLocks noGrp="1" noRot="1" noChangeAspect="1"/>
           </p:cNvSpPr>
@@ -5087,7 +5059,7 @@
       </p:sp>
       <p:sp>
         <p:nvSpPr>
-          <p:cNvPr id="117" name="Google Shape;117;g364e706d103_0_12:notes"/>
+          <p:cNvPr id="115" name="Google Shape;115;g364e706d103_0_12:notes"/>
           <p:cNvSpPr txBox="1">
             <a:spLocks noGrp="1"/>
           </p:cNvSpPr>
@@ -5136,7 +5108,7 @@
   <p:cSld>
     <p:spTree>
       <p:nvGrpSpPr>
-        <p:cNvPr id="1" name="Shape 123"/>
+        <p:cNvPr id="1" name="Shape 121"/>
         <p:cNvGrpSpPr/>
         <p:nvPr/>
       </p:nvGrpSpPr>
@@ -5150,7 +5122,7 @@
       </p:grpSpPr>
       <p:sp>
         <p:nvSpPr>
-          <p:cNvPr id="124" name="Google Shape;124;g364e706d103_0_19:notes"/>
+          <p:cNvPr id="122" name="Google Shape;122;g364e706d103_0_19:notes"/>
           <p:cNvSpPr>
             <a:spLocks noGrp="1" noRot="1" noChangeAspect="1"/>
           </p:cNvSpPr>
@@ -5191,7 +5163,7 @@
       </p:sp>
       <p:sp>
         <p:nvSpPr>
-          <p:cNvPr id="125" name="Google Shape;125;g364e706d103_0_19:notes"/>
+          <p:cNvPr id="123" name="Google Shape;123;g364e706d103_0_19:notes"/>
           <p:cNvSpPr txBox="1">
             <a:spLocks noGrp="1"/>
           </p:cNvSpPr>
@@ -6081,6 +6053,455 @@
               <a:t>‹#›</a:t>
             </a:fld>
             <a:endParaRPr/>
+          </a:p>
+        </p:txBody>
+      </p:sp>
+    </p:spTree>
+  </p:cSld>
+  <p:clrMapOvr>
+    <a:masterClrMapping/>
+  </p:clrMapOvr>
+</p:sldLayout>
+</file>
+
+<file path=ppt/slideLayouts/slideLayout12.xml><?xml version="1.0" encoding="utf-8"?>
+<p:sldLayout xmlns:a="http://schemas.openxmlformats.org/drawingml/2006/main" xmlns:r="http://schemas.openxmlformats.org/officeDocument/2006/relationships" xmlns:p="http://schemas.openxmlformats.org/presentationml/2006/main" matchingName="Blank 1" type="obj">
+  <p:cSld name="OBJECT">
+    <p:spTree>
+      <p:nvGrpSpPr>
+        <p:cNvPr id="1" name="Shape 50"/>
+        <p:cNvGrpSpPr/>
+        <p:nvPr/>
+      </p:nvGrpSpPr>
+      <p:grpSpPr>
+        <a:xfrm>
+          <a:off x="0" y="0"/>
+          <a:ext cx="0" cy="0"/>
+          <a:chOff x="0" y="0"/>
+          <a:chExt cx="0" cy="0"/>
+        </a:xfrm>
+      </p:grpSpPr>
+      <p:sp>
+        <p:nvSpPr>
+          <p:cNvPr id="51" name="Google Shape;51;p13"/>
+          <p:cNvSpPr txBox="1">
+            <a:spLocks noGrp="1"/>
+          </p:cNvSpPr>
+          <p:nvPr>
+            <p:ph type="ftr" idx="11"/>
+          </p:nvPr>
+        </p:nvSpPr>
+        <p:spPr>
+          <a:xfrm>
+            <a:off x="3499545" y="17007841"/>
+            <a:ext cx="3293700" cy="914400"/>
+          </a:xfrm>
+          <a:prstGeom prst="rect">
+            <a:avLst/>
+          </a:prstGeom>
+          <a:noFill/>
+          <a:ln>
+            <a:noFill/>
+          </a:ln>
+        </p:spPr>
+        <p:txBody>
+          <a:bodyPr spcFirstLastPara="1" wrap="square" lIns="0" tIns="0" rIns="0" bIns="0" anchor="t" anchorCtr="0">
+            <a:spAutoFit/>
+          </a:bodyPr>
+          <a:lstStyle>
+            <a:lvl1pPr lvl="0" algn="ctr">
+              <a:spcBef>
+                <a:spcPts val="0"/>
+              </a:spcBef>
+              <a:spcAft>
+                <a:spcPts val="0"/>
+              </a:spcAft>
+              <a:buSzPts val="1300"/>
+              <a:buNone/>
+              <a:defRPr sz="1300">
+                <a:solidFill>
+                  <a:srgbClr val="888888"/>
+                </a:solidFill>
+              </a:defRPr>
+            </a:lvl1pPr>
+            <a:lvl2pPr lvl="1">
+              <a:spcBef>
+                <a:spcPts val="0"/>
+              </a:spcBef>
+              <a:spcAft>
+                <a:spcPts val="0"/>
+              </a:spcAft>
+              <a:buSzPts val="1300"/>
+              <a:buNone/>
+              <a:defRPr sz="1300"/>
+            </a:lvl2pPr>
+            <a:lvl3pPr lvl="2">
+              <a:spcBef>
+                <a:spcPts val="0"/>
+              </a:spcBef>
+              <a:spcAft>
+                <a:spcPts val="0"/>
+              </a:spcAft>
+              <a:buSzPts val="1300"/>
+              <a:buNone/>
+              <a:defRPr sz="1300"/>
+            </a:lvl3pPr>
+            <a:lvl4pPr lvl="3">
+              <a:spcBef>
+                <a:spcPts val="0"/>
+              </a:spcBef>
+              <a:spcAft>
+                <a:spcPts val="0"/>
+              </a:spcAft>
+              <a:buSzPts val="1300"/>
+              <a:buNone/>
+              <a:defRPr sz="1300"/>
+            </a:lvl4pPr>
+            <a:lvl5pPr lvl="4">
+              <a:spcBef>
+                <a:spcPts val="0"/>
+              </a:spcBef>
+              <a:spcAft>
+                <a:spcPts val="0"/>
+              </a:spcAft>
+              <a:buSzPts val="1300"/>
+              <a:buNone/>
+              <a:defRPr sz="1300"/>
+            </a:lvl5pPr>
+            <a:lvl6pPr lvl="5">
+              <a:spcBef>
+                <a:spcPts val="0"/>
+              </a:spcBef>
+              <a:spcAft>
+                <a:spcPts val="0"/>
+              </a:spcAft>
+              <a:buSzPts val="1300"/>
+              <a:buNone/>
+              <a:defRPr sz="1300"/>
+            </a:lvl6pPr>
+            <a:lvl7pPr lvl="6">
+              <a:spcBef>
+                <a:spcPts val="0"/>
+              </a:spcBef>
+              <a:spcAft>
+                <a:spcPts val="0"/>
+              </a:spcAft>
+              <a:buSzPts val="1300"/>
+              <a:buNone/>
+              <a:defRPr sz="1300"/>
+            </a:lvl7pPr>
+            <a:lvl8pPr lvl="7">
+              <a:spcBef>
+                <a:spcPts val="0"/>
+              </a:spcBef>
+              <a:spcAft>
+                <a:spcPts val="0"/>
+              </a:spcAft>
+              <a:buSzPts val="1300"/>
+              <a:buNone/>
+              <a:defRPr sz="1300"/>
+            </a:lvl8pPr>
+            <a:lvl9pPr lvl="8">
+              <a:spcBef>
+                <a:spcPts val="0"/>
+              </a:spcBef>
+              <a:spcAft>
+                <a:spcPts val="0"/>
+              </a:spcAft>
+              <a:buSzPts val="1300"/>
+              <a:buNone/>
+              <a:defRPr sz="1300"/>
+            </a:lvl9pPr>
+          </a:lstStyle>
+          <a:p>
+            <a:endParaRPr/>
+          </a:p>
+        </p:txBody>
+      </p:sp>
+      <p:sp>
+        <p:nvSpPr>
+          <p:cNvPr id="52" name="Google Shape;52;p13"/>
+          <p:cNvSpPr txBox="1">
+            <a:spLocks noGrp="1"/>
+          </p:cNvSpPr>
+          <p:nvPr>
+            <p:ph type="dt" idx="10"/>
+          </p:nvPr>
+        </p:nvSpPr>
+        <p:spPr>
+          <a:xfrm>
+            <a:off x="514639" y="17007841"/>
+            <a:ext cx="2367600" cy="914400"/>
+          </a:xfrm>
+          <a:prstGeom prst="rect">
+            <a:avLst/>
+          </a:prstGeom>
+          <a:noFill/>
+          <a:ln>
+            <a:noFill/>
+          </a:ln>
+        </p:spPr>
+        <p:txBody>
+          <a:bodyPr spcFirstLastPara="1" wrap="square" lIns="0" tIns="0" rIns="0" bIns="0" anchor="t" anchorCtr="0">
+            <a:spAutoFit/>
+          </a:bodyPr>
+          <a:lstStyle>
+            <a:lvl1pPr lvl="0" algn="l">
+              <a:spcBef>
+                <a:spcPts val="0"/>
+              </a:spcBef>
+              <a:spcAft>
+                <a:spcPts val="0"/>
+              </a:spcAft>
+              <a:buSzPts val="1300"/>
+              <a:buNone/>
+              <a:defRPr sz="1300">
+                <a:solidFill>
+                  <a:srgbClr val="888888"/>
+                </a:solidFill>
+              </a:defRPr>
+            </a:lvl1pPr>
+            <a:lvl2pPr lvl="1">
+              <a:spcBef>
+                <a:spcPts val="0"/>
+              </a:spcBef>
+              <a:spcAft>
+                <a:spcPts val="0"/>
+              </a:spcAft>
+              <a:buSzPts val="1300"/>
+              <a:buNone/>
+              <a:defRPr sz="1300"/>
+            </a:lvl2pPr>
+            <a:lvl3pPr lvl="2">
+              <a:spcBef>
+                <a:spcPts val="0"/>
+              </a:spcBef>
+              <a:spcAft>
+                <a:spcPts val="0"/>
+              </a:spcAft>
+              <a:buSzPts val="1300"/>
+              <a:buNone/>
+              <a:defRPr sz="1300"/>
+            </a:lvl3pPr>
+            <a:lvl4pPr lvl="3">
+              <a:spcBef>
+                <a:spcPts val="0"/>
+              </a:spcBef>
+              <a:spcAft>
+                <a:spcPts val="0"/>
+              </a:spcAft>
+              <a:buSzPts val="1300"/>
+              <a:buNone/>
+              <a:defRPr sz="1300"/>
+            </a:lvl4pPr>
+            <a:lvl5pPr lvl="4">
+              <a:spcBef>
+                <a:spcPts val="0"/>
+              </a:spcBef>
+              <a:spcAft>
+                <a:spcPts val="0"/>
+              </a:spcAft>
+              <a:buSzPts val="1300"/>
+              <a:buNone/>
+              <a:defRPr sz="1300"/>
+            </a:lvl5pPr>
+            <a:lvl6pPr lvl="5">
+              <a:spcBef>
+                <a:spcPts val="0"/>
+              </a:spcBef>
+              <a:spcAft>
+                <a:spcPts val="0"/>
+              </a:spcAft>
+              <a:buSzPts val="1300"/>
+              <a:buNone/>
+              <a:defRPr sz="1300"/>
+            </a:lvl6pPr>
+            <a:lvl7pPr lvl="6">
+              <a:spcBef>
+                <a:spcPts val="0"/>
+              </a:spcBef>
+              <a:spcAft>
+                <a:spcPts val="0"/>
+              </a:spcAft>
+              <a:buSzPts val="1300"/>
+              <a:buNone/>
+              <a:defRPr sz="1300"/>
+            </a:lvl7pPr>
+            <a:lvl8pPr lvl="7">
+              <a:spcBef>
+                <a:spcPts val="0"/>
+              </a:spcBef>
+              <a:spcAft>
+                <a:spcPts val="0"/>
+              </a:spcAft>
+              <a:buSzPts val="1300"/>
+              <a:buNone/>
+              <a:defRPr sz="1300"/>
+            </a:lvl8pPr>
+            <a:lvl9pPr lvl="8">
+              <a:spcBef>
+                <a:spcPts val="0"/>
+              </a:spcBef>
+              <a:spcAft>
+                <a:spcPts val="0"/>
+              </a:spcAft>
+              <a:buSzPts val="1300"/>
+              <a:buNone/>
+              <a:defRPr sz="1300"/>
+            </a:lvl9pPr>
+          </a:lstStyle>
+          <a:p>
+            <a:endParaRPr/>
+          </a:p>
+        </p:txBody>
+      </p:sp>
+      <p:sp>
+        <p:nvSpPr>
+          <p:cNvPr id="53" name="Google Shape;53;p13"/>
+          <p:cNvSpPr txBox="1">
+            <a:spLocks noGrp="1"/>
+          </p:cNvSpPr>
+          <p:nvPr>
+            <p:ph type="sldNum" idx="12"/>
+          </p:nvPr>
+        </p:nvSpPr>
+        <p:spPr>
+          <a:xfrm>
+            <a:off x="7410801" y="17007841"/>
+            <a:ext cx="2367600" cy="297900"/>
+          </a:xfrm>
+          <a:prstGeom prst="rect">
+            <a:avLst/>
+          </a:prstGeom>
+          <a:noFill/>
+          <a:ln>
+            <a:noFill/>
+          </a:ln>
+        </p:spPr>
+        <p:txBody>
+          <a:bodyPr spcFirstLastPara="1" wrap="square" lIns="0" tIns="0" rIns="0" bIns="0" anchor="t" anchorCtr="0">
+            <a:spAutoFit/>
+          </a:bodyPr>
+          <a:lstStyle>
+            <a:lvl1pPr lvl="0" indent="0" algn="r">
+              <a:spcBef>
+                <a:spcPts val="0"/>
+              </a:spcBef>
+              <a:buNone/>
+              <a:defRPr>
+                <a:solidFill>
+                  <a:srgbClr val="888888"/>
+                </a:solidFill>
+              </a:defRPr>
+            </a:lvl1pPr>
+            <a:lvl2pPr lvl="1" indent="0" algn="r">
+              <a:spcBef>
+                <a:spcPts val="0"/>
+              </a:spcBef>
+              <a:buNone/>
+              <a:defRPr>
+                <a:solidFill>
+                  <a:srgbClr val="888888"/>
+                </a:solidFill>
+              </a:defRPr>
+            </a:lvl2pPr>
+            <a:lvl3pPr lvl="2" indent="0" algn="r">
+              <a:spcBef>
+                <a:spcPts val="0"/>
+              </a:spcBef>
+              <a:buNone/>
+              <a:defRPr>
+                <a:solidFill>
+                  <a:srgbClr val="888888"/>
+                </a:solidFill>
+              </a:defRPr>
+            </a:lvl3pPr>
+            <a:lvl4pPr lvl="3" indent="0" algn="r">
+              <a:spcBef>
+                <a:spcPts val="0"/>
+              </a:spcBef>
+              <a:buNone/>
+              <a:defRPr>
+                <a:solidFill>
+                  <a:srgbClr val="888888"/>
+                </a:solidFill>
+              </a:defRPr>
+            </a:lvl4pPr>
+            <a:lvl5pPr lvl="4" indent="0" algn="r">
+              <a:spcBef>
+                <a:spcPts val="0"/>
+              </a:spcBef>
+              <a:buNone/>
+              <a:defRPr>
+                <a:solidFill>
+                  <a:srgbClr val="888888"/>
+                </a:solidFill>
+              </a:defRPr>
+            </a:lvl5pPr>
+            <a:lvl6pPr lvl="5" indent="0" algn="r">
+              <a:spcBef>
+                <a:spcPts val="0"/>
+              </a:spcBef>
+              <a:buNone/>
+              <a:defRPr>
+                <a:solidFill>
+                  <a:srgbClr val="888888"/>
+                </a:solidFill>
+              </a:defRPr>
+            </a:lvl6pPr>
+            <a:lvl7pPr lvl="6" indent="0" algn="r">
+              <a:spcBef>
+                <a:spcPts val="0"/>
+              </a:spcBef>
+              <a:buNone/>
+              <a:defRPr>
+                <a:solidFill>
+                  <a:srgbClr val="888888"/>
+                </a:solidFill>
+              </a:defRPr>
+            </a:lvl7pPr>
+            <a:lvl8pPr lvl="7" indent="0" algn="r">
+              <a:spcBef>
+                <a:spcPts val="0"/>
+              </a:spcBef>
+              <a:buNone/>
+              <a:defRPr>
+                <a:solidFill>
+                  <a:srgbClr val="888888"/>
+                </a:solidFill>
+              </a:defRPr>
+            </a:lvl8pPr>
+            <a:lvl9pPr lvl="8" indent="0" algn="r">
+              <a:spcBef>
+                <a:spcPts val="0"/>
+              </a:spcBef>
+              <a:buNone/>
+              <a:defRPr>
+                <a:solidFill>
+                  <a:srgbClr val="888888"/>
+                </a:solidFill>
+              </a:defRPr>
+            </a:lvl9pPr>
+          </a:lstStyle>
+          <a:p>
+            <a:pPr marL="0" lvl="0" indent="0" algn="r" rtl="0">
+              <a:spcBef>
+                <a:spcPts val="0"/>
+              </a:spcBef>
+              <a:spcAft>
+                <a:spcPts val="0"/>
+              </a:spcAft>
+              <a:buNone/>
+            </a:pPr>
+            <a:fld id="{00000000-1234-1234-1234-123412341234}" type="slidenum">
+              <a:rPr lang="en"/>
+              <a:t>‹#›</a:t>
+            </a:fld>
+            <a:endParaRPr>
+              <a:solidFill>
+                <a:schemeClr val="dk2"/>
+              </a:solidFill>
+            </a:endParaRPr>
           </a:p>
         </p:txBody>
       </p:sp>
@@ -9290,6 +9711,7 @@
     <p:sldLayoutId id="2147483656" r:id="rId9"/>
     <p:sldLayoutId id="2147483657" r:id="rId10"/>
     <p:sldLayoutId id="2147483658" r:id="rId11"/>
+    <p:sldLayoutId id="2147483659" r:id="rId12"/>
   </p:sldLayoutIdLst>
   <p:hf sldNum="0" hdr="0" ftr="0" dt="0"/>
   <p:txStyles>
@@ -10002,7 +10424,7 @@
     </p:bg>
     <p:spTree>
       <p:nvGrpSpPr>
-        <p:cNvPr id="1" name="Shape 53"/>
+        <p:cNvPr id="1" name="Shape 57"/>
         <p:cNvGrpSpPr/>
         <p:nvPr/>
       </p:nvGrpSpPr>
@@ -10016,7 +10438,7 @@
       </p:grpSpPr>
       <p:sp>
         <p:nvSpPr>
-          <p:cNvPr id="54" name="Google Shape;54;p13"/>
+          <p:cNvPr id="58" name="Google Shape;58;p14"/>
           <p:cNvSpPr txBox="1"/>
           <p:nvPr/>
         </p:nvSpPr>
@@ -10098,7 +10520,7 @@
     </p:bg>
     <p:spTree>
       <p:nvGrpSpPr>
-        <p:cNvPr id="1" name="Shape 134"/>
+        <p:cNvPr id="1" name="Shape 132"/>
         <p:cNvGrpSpPr/>
         <p:nvPr/>
       </p:nvGrpSpPr>
@@ -10112,7 +10534,7 @@
       </p:grpSpPr>
       <p:sp>
         <p:nvSpPr>
-          <p:cNvPr id="135" name="Google Shape;135;p22"/>
+          <p:cNvPr id="133" name="Google Shape;133;p23"/>
           <p:cNvSpPr txBox="1"/>
           <p:nvPr/>
         </p:nvSpPr>
@@ -10170,7 +10592,7 @@
       </p:sp>
       <p:sp>
         <p:nvSpPr>
-          <p:cNvPr id="136" name="Google Shape;136;p22"/>
+          <p:cNvPr id="134" name="Google Shape;134;p23"/>
           <p:cNvSpPr txBox="1"/>
           <p:nvPr/>
         </p:nvSpPr>
@@ -10228,7 +10650,7 @@
       </p:sp>
       <p:sp>
         <p:nvSpPr>
-          <p:cNvPr id="137" name="Google Shape;137;p22"/>
+          <p:cNvPr id="135" name="Google Shape;135;p23"/>
           <p:cNvSpPr txBox="1"/>
           <p:nvPr/>
         </p:nvSpPr>
@@ -10289,7 +10711,7 @@
       </p:sp>
       <p:sp>
         <p:nvSpPr>
-          <p:cNvPr id="138" name="Google Shape;138;p22"/>
+          <p:cNvPr id="136" name="Google Shape;136;p23"/>
           <p:cNvSpPr txBox="1"/>
           <p:nvPr/>
         </p:nvSpPr>
@@ -10374,7 +10796,7 @@
     </p:bg>
     <p:spTree>
       <p:nvGrpSpPr>
-        <p:cNvPr id="1" name="Shape 142"/>
+        <p:cNvPr id="1" name="Shape 140"/>
         <p:cNvGrpSpPr/>
         <p:nvPr/>
       </p:nvGrpSpPr>
@@ -10412,7 +10834,7 @@
     </p:bg>
     <p:spTree>
       <p:nvGrpSpPr>
-        <p:cNvPr id="1" name="Shape 146"/>
+        <p:cNvPr id="1" name="Shape 144"/>
         <p:cNvGrpSpPr/>
         <p:nvPr/>
       </p:nvGrpSpPr>
@@ -10426,7 +10848,7 @@
       </p:grpSpPr>
       <p:sp>
         <p:nvSpPr>
-          <p:cNvPr id="147" name="Google Shape;147;p24"/>
+          <p:cNvPr id="145" name="Google Shape;145;p25"/>
           <p:cNvSpPr txBox="1"/>
           <p:nvPr/>
         </p:nvSpPr>
@@ -10501,22 +10923,9 @@
 <file path=ppt/slides/slide13.xml><?xml version="1.0" encoding="utf-8"?>
 <p:sld xmlns:a="http://schemas.openxmlformats.org/drawingml/2006/main" xmlns:r="http://schemas.openxmlformats.org/officeDocument/2006/relationships" xmlns:p="http://schemas.openxmlformats.org/presentationml/2006/main">
   <p:cSld>
-    <p:bg>
-      <p:bgPr>
-        <a:blipFill>
-          <a:blip r:embed="rId3">
-            <a:alphaModFix/>
-          </a:blip>
-          <a:stretch>
-            <a:fillRect/>
-          </a:stretch>
-        </a:blipFill>
-        <a:effectLst/>
-      </p:bgPr>
-    </p:bg>
     <p:spTree>
       <p:nvGrpSpPr>
-        <p:cNvPr id="1" name="Shape 151"/>
+        <p:cNvPr id="1" name="Shape 149"/>
         <p:cNvGrpSpPr/>
         <p:nvPr/>
       </p:nvGrpSpPr>
@@ -10528,15 +10937,678 @@
           <a:chExt cx="0" cy="0"/>
         </a:xfrm>
       </p:grpSpPr>
-      <p:sp>
-        <p:nvSpPr>
-          <p:cNvPr id="152" name="Google Shape;152;p25"/>
+      <p:pic>
+        <p:nvPicPr>
+          <p:cNvPr id="150" name="Google Shape;150;p26"/>
+          <p:cNvPicPr preferRelativeResize="0"/>
+          <p:nvPr/>
+        </p:nvPicPr>
+        <p:blipFill rotWithShape="1">
+          <a:blip r:embed="rId3">
+            <a:alphaModFix/>
+          </a:blip>
+          <a:srcRect/>
+          <a:stretch/>
+        </p:blipFill>
+        <p:spPr>
+          <a:xfrm>
+            <a:off x="902197" y="6555158"/>
+            <a:ext cx="8156021" cy="3078938"/>
+          </a:xfrm>
+          <a:prstGeom prst="rect">
+            <a:avLst/>
+          </a:prstGeom>
+          <a:noFill/>
+          <a:ln>
+            <a:noFill/>
+          </a:ln>
+        </p:spPr>
+      </p:pic>
+      <p:pic>
+        <p:nvPicPr>
+          <p:cNvPr id="151" name="Google Shape;151;p26"/>
+          <p:cNvPicPr preferRelativeResize="0"/>
+          <p:nvPr/>
+        </p:nvPicPr>
+        <p:blipFill rotWithShape="1">
+          <a:blip r:embed="rId4">
+            <a:alphaModFix/>
+          </a:blip>
+          <a:srcRect/>
+          <a:stretch/>
+        </p:blipFill>
+        <p:spPr>
+          <a:xfrm>
+            <a:off x="924531" y="930438"/>
+            <a:ext cx="8111336" cy="4036278"/>
+          </a:xfrm>
+          <a:prstGeom prst="rect">
+            <a:avLst/>
+          </a:prstGeom>
+          <a:noFill/>
+          <a:ln>
+            <a:noFill/>
+          </a:ln>
+        </p:spPr>
+      </p:pic>
+      <p:grpSp>
+        <p:nvGrpSpPr>
+          <p:cNvPr id="152" name="Google Shape;152;p26"/>
+          <p:cNvGrpSpPr/>
+          <p:nvPr/>
+        </p:nvGrpSpPr>
+        <p:grpSpPr>
+          <a:xfrm>
+            <a:off x="8443178" y="16440779"/>
+            <a:ext cx="924937" cy="934050"/>
+            <a:chOff x="9277198" y="18072748"/>
+            <a:chExt cx="1016303" cy="1026767"/>
+          </a:xfrm>
+        </p:grpSpPr>
+        <p:sp>
+          <p:nvSpPr>
+            <p:cNvPr id="153" name="Google Shape;153;p26"/>
+            <p:cNvSpPr/>
+            <p:nvPr/>
+          </p:nvSpPr>
+          <p:spPr>
+            <a:xfrm>
+              <a:off x="9308617" y="18114631"/>
+              <a:ext cx="984884" cy="984884"/>
+            </a:xfrm>
+            <a:custGeom>
+              <a:avLst/>
+              <a:gdLst/>
+              <a:ahLst/>
+              <a:cxnLst/>
+              <a:rect l="l" t="t" r="r" b="b"/>
+              <a:pathLst>
+                <a:path w="984884" h="984884" extrusionOk="0">
+                  <a:moveTo>
+                    <a:pt x="774845" y="0"/>
+                  </a:moveTo>
+                  <a:lnTo>
+                    <a:pt x="209417" y="0"/>
+                  </a:lnTo>
+                  <a:lnTo>
+                    <a:pt x="161400" y="5530"/>
+                  </a:lnTo>
+                  <a:lnTo>
+                    <a:pt x="117321" y="21285"/>
+                  </a:lnTo>
+                  <a:lnTo>
+                    <a:pt x="78437" y="46006"/>
+                  </a:lnTo>
+                  <a:lnTo>
+                    <a:pt x="46006" y="78437"/>
+                  </a:lnTo>
+                  <a:lnTo>
+                    <a:pt x="21285" y="117321"/>
+                  </a:lnTo>
+                  <a:lnTo>
+                    <a:pt x="5530" y="161400"/>
+                  </a:lnTo>
+                  <a:lnTo>
+                    <a:pt x="0" y="209417"/>
+                  </a:lnTo>
+                  <a:lnTo>
+                    <a:pt x="0" y="774845"/>
+                  </a:lnTo>
+                  <a:lnTo>
+                    <a:pt x="5530" y="822863"/>
+                  </a:lnTo>
+                  <a:lnTo>
+                    <a:pt x="21285" y="866942"/>
+                  </a:lnTo>
+                  <a:lnTo>
+                    <a:pt x="46006" y="905825"/>
+                  </a:lnTo>
+                  <a:lnTo>
+                    <a:pt x="78437" y="938256"/>
+                  </a:lnTo>
+                  <a:lnTo>
+                    <a:pt x="117321" y="962977"/>
+                  </a:lnTo>
+                  <a:lnTo>
+                    <a:pt x="161400" y="978732"/>
+                  </a:lnTo>
+                  <a:lnTo>
+                    <a:pt x="209417" y="984263"/>
+                  </a:lnTo>
+                  <a:lnTo>
+                    <a:pt x="774845" y="984263"/>
+                  </a:lnTo>
+                  <a:lnTo>
+                    <a:pt x="822863" y="978732"/>
+                  </a:lnTo>
+                  <a:lnTo>
+                    <a:pt x="866942" y="962977"/>
+                  </a:lnTo>
+                  <a:lnTo>
+                    <a:pt x="905825" y="938256"/>
+                  </a:lnTo>
+                  <a:lnTo>
+                    <a:pt x="938256" y="905825"/>
+                  </a:lnTo>
+                  <a:lnTo>
+                    <a:pt x="962977" y="866942"/>
+                  </a:lnTo>
+                  <a:lnTo>
+                    <a:pt x="978732" y="822863"/>
+                  </a:lnTo>
+                  <a:lnTo>
+                    <a:pt x="984263" y="774845"/>
+                  </a:lnTo>
+                  <a:lnTo>
+                    <a:pt x="984263" y="209417"/>
+                  </a:lnTo>
+                  <a:lnTo>
+                    <a:pt x="978732" y="161400"/>
+                  </a:lnTo>
+                  <a:lnTo>
+                    <a:pt x="962977" y="117321"/>
+                  </a:lnTo>
+                  <a:lnTo>
+                    <a:pt x="938256" y="78437"/>
+                  </a:lnTo>
+                  <a:lnTo>
+                    <a:pt x="905825" y="46006"/>
+                  </a:lnTo>
+                  <a:lnTo>
+                    <a:pt x="866942" y="21285"/>
+                  </a:lnTo>
+                  <a:lnTo>
+                    <a:pt x="822863" y="5530"/>
+                  </a:lnTo>
+                  <a:lnTo>
+                    <a:pt x="774845" y="0"/>
+                  </a:lnTo>
+                  <a:close/>
+                </a:path>
+              </a:pathLst>
+            </a:custGeom>
+            <a:solidFill>
+              <a:srgbClr val="000000"/>
+            </a:solidFill>
+            <a:ln>
+              <a:noFill/>
+            </a:ln>
+          </p:spPr>
+          <p:txBody>
+            <a:bodyPr spcFirstLastPara="1" wrap="square" lIns="0" tIns="0" rIns="0" bIns="0" anchor="t" anchorCtr="0">
+              <a:noAutofit/>
+            </a:bodyPr>
+            <a:lstStyle/>
+            <a:p>
+              <a:pPr marL="0" lvl="0" indent="0" algn="l" rtl="0">
+                <a:spcBef>
+                  <a:spcPts val="0"/>
+                </a:spcBef>
+                <a:spcAft>
+                  <a:spcPts val="0"/>
+                </a:spcAft>
+                <a:buNone/>
+              </a:pPr>
+              <a:endParaRPr sz="1300"/>
+            </a:p>
+          </p:txBody>
+        </p:sp>
+        <p:sp>
+          <p:nvSpPr>
+            <p:cNvPr id="154" name="Google Shape;154;p26"/>
+            <p:cNvSpPr/>
+            <p:nvPr/>
+          </p:nvSpPr>
+          <p:spPr>
+            <a:xfrm>
+              <a:off x="9277204" y="18072748"/>
+              <a:ext cx="984884" cy="984884"/>
+            </a:xfrm>
+            <a:custGeom>
+              <a:avLst/>
+              <a:gdLst/>
+              <a:ahLst/>
+              <a:cxnLst/>
+              <a:rect l="l" t="t" r="r" b="b"/>
+              <a:pathLst>
+                <a:path w="984884" h="984884" extrusionOk="0">
+                  <a:moveTo>
+                    <a:pt x="774845" y="0"/>
+                  </a:moveTo>
+                  <a:lnTo>
+                    <a:pt x="209417" y="0"/>
+                  </a:lnTo>
+                  <a:lnTo>
+                    <a:pt x="161400" y="5530"/>
+                  </a:lnTo>
+                  <a:lnTo>
+                    <a:pt x="117321" y="21285"/>
+                  </a:lnTo>
+                  <a:lnTo>
+                    <a:pt x="78437" y="46006"/>
+                  </a:lnTo>
+                  <a:lnTo>
+                    <a:pt x="46006" y="78437"/>
+                  </a:lnTo>
+                  <a:lnTo>
+                    <a:pt x="21285" y="117321"/>
+                  </a:lnTo>
+                  <a:lnTo>
+                    <a:pt x="5530" y="161400"/>
+                  </a:lnTo>
+                  <a:lnTo>
+                    <a:pt x="0" y="209417"/>
+                  </a:lnTo>
+                  <a:lnTo>
+                    <a:pt x="0" y="774845"/>
+                  </a:lnTo>
+                  <a:lnTo>
+                    <a:pt x="5530" y="822863"/>
+                  </a:lnTo>
+                  <a:lnTo>
+                    <a:pt x="21285" y="866942"/>
+                  </a:lnTo>
+                  <a:lnTo>
+                    <a:pt x="46006" y="905825"/>
+                  </a:lnTo>
+                  <a:lnTo>
+                    <a:pt x="78437" y="938256"/>
+                  </a:lnTo>
+                  <a:lnTo>
+                    <a:pt x="117321" y="962977"/>
+                  </a:lnTo>
+                  <a:lnTo>
+                    <a:pt x="161400" y="978732"/>
+                  </a:lnTo>
+                  <a:lnTo>
+                    <a:pt x="209417" y="984263"/>
+                  </a:lnTo>
+                  <a:lnTo>
+                    <a:pt x="774845" y="984263"/>
+                  </a:lnTo>
+                  <a:lnTo>
+                    <a:pt x="822863" y="978732"/>
+                  </a:lnTo>
+                  <a:lnTo>
+                    <a:pt x="866942" y="962977"/>
+                  </a:lnTo>
+                  <a:lnTo>
+                    <a:pt x="905825" y="938256"/>
+                  </a:lnTo>
+                  <a:lnTo>
+                    <a:pt x="938256" y="905825"/>
+                  </a:lnTo>
+                  <a:lnTo>
+                    <a:pt x="962977" y="866942"/>
+                  </a:lnTo>
+                  <a:lnTo>
+                    <a:pt x="978732" y="822863"/>
+                  </a:lnTo>
+                  <a:lnTo>
+                    <a:pt x="984263" y="774845"/>
+                  </a:lnTo>
+                  <a:lnTo>
+                    <a:pt x="984263" y="209417"/>
+                  </a:lnTo>
+                  <a:lnTo>
+                    <a:pt x="978732" y="161400"/>
+                  </a:lnTo>
+                  <a:lnTo>
+                    <a:pt x="962977" y="117321"/>
+                  </a:lnTo>
+                  <a:lnTo>
+                    <a:pt x="938256" y="78437"/>
+                  </a:lnTo>
+                  <a:lnTo>
+                    <a:pt x="905825" y="46006"/>
+                  </a:lnTo>
+                  <a:lnTo>
+                    <a:pt x="866942" y="21285"/>
+                  </a:lnTo>
+                  <a:lnTo>
+                    <a:pt x="822863" y="5530"/>
+                  </a:lnTo>
+                  <a:lnTo>
+                    <a:pt x="774845" y="0"/>
+                  </a:lnTo>
+                  <a:close/>
+                </a:path>
+              </a:pathLst>
+            </a:custGeom>
+            <a:solidFill>
+              <a:srgbClr val="FFC567"/>
+            </a:solidFill>
+            <a:ln>
+              <a:noFill/>
+            </a:ln>
+          </p:spPr>
+          <p:txBody>
+            <a:bodyPr spcFirstLastPara="1" wrap="square" lIns="0" tIns="0" rIns="0" bIns="0" anchor="t" anchorCtr="0">
+              <a:noAutofit/>
+            </a:bodyPr>
+            <a:lstStyle/>
+            <a:p>
+              <a:pPr marL="0" lvl="0" indent="0" algn="l" rtl="0">
+                <a:spcBef>
+                  <a:spcPts val="0"/>
+                </a:spcBef>
+                <a:spcAft>
+                  <a:spcPts val="0"/>
+                </a:spcAft>
+                <a:buNone/>
+              </a:pPr>
+              <a:endParaRPr sz="1300"/>
+            </a:p>
+          </p:txBody>
+        </p:sp>
+        <p:sp>
+          <p:nvSpPr>
+            <p:cNvPr id="155" name="Google Shape;155;p26"/>
+            <p:cNvSpPr/>
+            <p:nvPr/>
+          </p:nvSpPr>
+          <p:spPr>
+            <a:xfrm>
+              <a:off x="9277198" y="18072760"/>
+              <a:ext cx="984884" cy="984884"/>
+            </a:xfrm>
+            <a:custGeom>
+              <a:avLst/>
+              <a:gdLst/>
+              <a:ahLst/>
+              <a:cxnLst/>
+              <a:rect l="l" t="t" r="r" b="b"/>
+              <a:pathLst>
+                <a:path w="984884" h="984884" extrusionOk="0">
+                  <a:moveTo>
+                    <a:pt x="816940" y="488848"/>
+                  </a:moveTo>
+                  <a:lnTo>
+                    <a:pt x="758710" y="430618"/>
+                  </a:lnTo>
+                  <a:lnTo>
+                    <a:pt x="533146" y="656170"/>
+                  </a:lnTo>
+                  <a:lnTo>
+                    <a:pt x="533146" y="164045"/>
+                  </a:lnTo>
+                  <a:lnTo>
+                    <a:pt x="451129" y="164045"/>
+                  </a:lnTo>
+                  <a:lnTo>
+                    <a:pt x="451129" y="656170"/>
+                  </a:lnTo>
+                  <a:lnTo>
+                    <a:pt x="225564" y="430618"/>
+                  </a:lnTo>
+                  <a:lnTo>
+                    <a:pt x="167335" y="488848"/>
+                  </a:lnTo>
+                  <a:lnTo>
+                    <a:pt x="492137" y="813650"/>
+                  </a:lnTo>
+                  <a:lnTo>
+                    <a:pt x="816940" y="488848"/>
+                  </a:lnTo>
+                  <a:close/>
+                </a:path>
+                <a:path w="984884" h="984884" extrusionOk="0">
+                  <a:moveTo>
+                    <a:pt x="984262" y="209410"/>
+                  </a:moveTo>
+                  <a:lnTo>
+                    <a:pt x="978738" y="161391"/>
+                  </a:lnTo>
+                  <a:lnTo>
+                    <a:pt x="962977" y="117309"/>
+                  </a:lnTo>
+                  <a:lnTo>
+                    <a:pt x="942378" y="84924"/>
+                  </a:lnTo>
+                  <a:lnTo>
+                    <a:pt x="942378" y="209410"/>
+                  </a:lnTo>
+                  <a:lnTo>
+                    <a:pt x="942378" y="774839"/>
+                  </a:lnTo>
+                  <a:lnTo>
+                    <a:pt x="936396" y="819378"/>
+                  </a:lnTo>
+                  <a:lnTo>
+                    <a:pt x="919505" y="859396"/>
+                  </a:lnTo>
+                  <a:lnTo>
+                    <a:pt x="893305" y="893305"/>
+                  </a:lnTo>
+                  <a:lnTo>
+                    <a:pt x="859409" y="919505"/>
+                  </a:lnTo>
+                  <a:lnTo>
+                    <a:pt x="819378" y="936383"/>
+                  </a:lnTo>
+                  <a:lnTo>
+                    <a:pt x="774839" y="942378"/>
+                  </a:lnTo>
+                  <a:lnTo>
+                    <a:pt x="209423" y="942378"/>
+                  </a:lnTo>
+                  <a:lnTo>
+                    <a:pt x="164884" y="936383"/>
+                  </a:lnTo>
+                  <a:lnTo>
+                    <a:pt x="124866" y="919505"/>
+                  </a:lnTo>
+                  <a:lnTo>
+                    <a:pt x="90957" y="893305"/>
+                  </a:lnTo>
+                  <a:lnTo>
+                    <a:pt x="64757" y="859396"/>
+                  </a:lnTo>
+                  <a:lnTo>
+                    <a:pt x="47866" y="819378"/>
+                  </a:lnTo>
+                  <a:lnTo>
+                    <a:pt x="41884" y="774839"/>
+                  </a:lnTo>
+                  <a:lnTo>
+                    <a:pt x="41884" y="209410"/>
+                  </a:lnTo>
+                  <a:lnTo>
+                    <a:pt x="47866" y="164871"/>
+                  </a:lnTo>
+                  <a:lnTo>
+                    <a:pt x="64757" y="124853"/>
+                  </a:lnTo>
+                  <a:lnTo>
+                    <a:pt x="90957" y="90944"/>
+                  </a:lnTo>
+                  <a:lnTo>
+                    <a:pt x="124866" y="64757"/>
+                  </a:lnTo>
+                  <a:lnTo>
+                    <a:pt x="164884" y="47866"/>
+                  </a:lnTo>
+                  <a:lnTo>
+                    <a:pt x="209423" y="41871"/>
+                  </a:lnTo>
+                  <a:lnTo>
+                    <a:pt x="774839" y="41871"/>
+                  </a:lnTo>
+                  <a:lnTo>
+                    <a:pt x="819378" y="47866"/>
+                  </a:lnTo>
+                  <a:lnTo>
+                    <a:pt x="859409" y="64757"/>
+                  </a:lnTo>
+                  <a:lnTo>
+                    <a:pt x="893305" y="90944"/>
+                  </a:lnTo>
+                  <a:lnTo>
+                    <a:pt x="919505" y="124853"/>
+                  </a:lnTo>
+                  <a:lnTo>
+                    <a:pt x="936396" y="164871"/>
+                  </a:lnTo>
+                  <a:lnTo>
+                    <a:pt x="942378" y="209410"/>
+                  </a:lnTo>
+                  <a:lnTo>
+                    <a:pt x="942378" y="84924"/>
+                  </a:lnTo>
+                  <a:lnTo>
+                    <a:pt x="905827" y="45999"/>
+                  </a:lnTo>
+                  <a:lnTo>
+                    <a:pt x="866940" y="21285"/>
+                  </a:lnTo>
+                  <a:lnTo>
+                    <a:pt x="822858" y="5524"/>
+                  </a:lnTo>
+                  <a:lnTo>
+                    <a:pt x="774839" y="0"/>
+                  </a:lnTo>
+                  <a:lnTo>
+                    <a:pt x="209423" y="0"/>
+                  </a:lnTo>
+                  <a:lnTo>
+                    <a:pt x="161404" y="5524"/>
+                  </a:lnTo>
+                  <a:lnTo>
+                    <a:pt x="117322" y="21285"/>
+                  </a:lnTo>
+                  <a:lnTo>
+                    <a:pt x="78435" y="45999"/>
+                  </a:lnTo>
+                  <a:lnTo>
+                    <a:pt x="46012" y="78435"/>
+                  </a:lnTo>
+                  <a:lnTo>
+                    <a:pt x="21285" y="117309"/>
+                  </a:lnTo>
+                  <a:lnTo>
+                    <a:pt x="5537" y="161391"/>
+                  </a:lnTo>
+                  <a:lnTo>
+                    <a:pt x="0" y="209410"/>
+                  </a:lnTo>
+                  <a:lnTo>
+                    <a:pt x="0" y="774839"/>
+                  </a:lnTo>
+                  <a:lnTo>
+                    <a:pt x="5537" y="822858"/>
+                  </a:lnTo>
+                  <a:lnTo>
+                    <a:pt x="21285" y="866940"/>
+                  </a:lnTo>
+                  <a:lnTo>
+                    <a:pt x="46012" y="905814"/>
+                  </a:lnTo>
+                  <a:lnTo>
+                    <a:pt x="78435" y="938250"/>
+                  </a:lnTo>
+                  <a:lnTo>
+                    <a:pt x="117322" y="962977"/>
+                  </a:lnTo>
+                  <a:lnTo>
+                    <a:pt x="161404" y="978725"/>
+                  </a:lnTo>
+                  <a:lnTo>
+                    <a:pt x="209423" y="984262"/>
+                  </a:lnTo>
+                  <a:lnTo>
+                    <a:pt x="774839" y="984262"/>
+                  </a:lnTo>
+                  <a:lnTo>
+                    <a:pt x="822858" y="978725"/>
+                  </a:lnTo>
+                  <a:lnTo>
+                    <a:pt x="866940" y="962977"/>
+                  </a:lnTo>
+                  <a:lnTo>
+                    <a:pt x="905827" y="938250"/>
+                  </a:lnTo>
+                  <a:lnTo>
+                    <a:pt x="938250" y="905814"/>
+                  </a:lnTo>
+                  <a:lnTo>
+                    <a:pt x="962977" y="866940"/>
+                  </a:lnTo>
+                  <a:lnTo>
+                    <a:pt x="978738" y="822858"/>
+                  </a:lnTo>
+                  <a:lnTo>
+                    <a:pt x="984262" y="774839"/>
+                  </a:lnTo>
+                  <a:lnTo>
+                    <a:pt x="984262" y="209410"/>
+                  </a:lnTo>
+                  <a:close/>
+                </a:path>
+              </a:pathLst>
+            </a:custGeom>
+            <a:solidFill>
+              <a:srgbClr val="000000"/>
+            </a:solidFill>
+            <a:ln>
+              <a:noFill/>
+            </a:ln>
+          </p:spPr>
+          <p:txBody>
+            <a:bodyPr spcFirstLastPara="1" wrap="square" lIns="0" tIns="0" rIns="0" bIns="0" anchor="t" anchorCtr="0">
+              <a:noAutofit/>
+            </a:bodyPr>
+            <a:lstStyle/>
+            <a:p>
+              <a:pPr marL="0" lvl="0" indent="0" algn="l" rtl="0">
+                <a:spcBef>
+                  <a:spcPts val="0"/>
+                </a:spcBef>
+                <a:spcAft>
+                  <a:spcPts val="0"/>
+                </a:spcAft>
+                <a:buNone/>
+              </a:pPr>
+              <a:endParaRPr sz="1300"/>
+            </a:p>
+          </p:txBody>
+        </p:sp>
+      </p:grpSp>
+      <p:pic>
+        <p:nvPicPr>
+          <p:cNvPr id="156" name="Google Shape;156;p26"/>
+          <p:cNvPicPr preferRelativeResize="0"/>
+          <p:nvPr/>
+        </p:nvPicPr>
+        <p:blipFill rotWithShape="1">
+          <a:blip r:embed="rId5">
+            <a:alphaModFix/>
+          </a:blip>
+          <a:srcRect/>
+          <a:stretch/>
+        </p:blipFill>
+        <p:spPr>
+          <a:xfrm>
+            <a:off x="952205" y="16499967"/>
+            <a:ext cx="5042000" cy="839724"/>
+          </a:xfrm>
+          <a:prstGeom prst="rect">
+            <a:avLst/>
+          </a:prstGeom>
+          <a:noFill/>
+          <a:ln>
+            <a:noFill/>
+          </a:ln>
+        </p:spPr>
+      </p:pic>
+      <p:sp>
+        <p:nvSpPr>
+          <p:cNvPr id="157" name="Google Shape;157;p26"/>
           <p:cNvSpPr txBox="1"/>
           <p:nvPr/>
         </p:nvSpPr>
         <p:spPr>
           <a:xfrm>
-            <a:off x="966125" y="10821875"/>
+            <a:off x="940200" y="10969125"/>
             <a:ext cx="8406600" cy="5275500"/>
           </a:xfrm>
           <a:prstGeom prst="rect">
@@ -10604,7 +11676,7 @@
     </p:bg>
     <p:spTree>
       <p:nvGrpSpPr>
-        <p:cNvPr id="1" name="Shape 156"/>
+        <p:cNvPr id="1" name="Shape 161"/>
         <p:cNvGrpSpPr/>
         <p:nvPr/>
       </p:nvGrpSpPr>
@@ -10618,7 +11690,7 @@
       </p:grpSpPr>
       <p:sp>
         <p:nvSpPr>
-          <p:cNvPr id="157" name="Google Shape;157;p26"/>
+          <p:cNvPr id="162" name="Google Shape;162;p27"/>
           <p:cNvSpPr txBox="1"/>
           <p:nvPr/>
         </p:nvSpPr>
@@ -10676,7 +11748,7 @@
       </p:sp>
       <p:sp>
         <p:nvSpPr>
-          <p:cNvPr id="158" name="Google Shape;158;p26"/>
+          <p:cNvPr id="163" name="Google Shape;163;p27"/>
           <p:cNvSpPr txBox="1"/>
           <p:nvPr/>
         </p:nvSpPr>
@@ -10761,7 +11833,7 @@
     </p:bg>
     <p:spTree>
       <p:nvGrpSpPr>
-        <p:cNvPr id="1" name="Shape 162"/>
+        <p:cNvPr id="1" name="Shape 167"/>
         <p:cNvGrpSpPr/>
         <p:nvPr/>
       </p:nvGrpSpPr>
@@ -10775,7 +11847,7 @@
       </p:grpSpPr>
       <p:sp>
         <p:nvSpPr>
-          <p:cNvPr id="163" name="Google Shape;163;p27"/>
+          <p:cNvPr id="168" name="Google Shape;168;p28"/>
           <p:cNvSpPr txBox="1"/>
           <p:nvPr/>
         </p:nvSpPr>
@@ -10833,7 +11905,7 @@
       </p:sp>
       <p:sp>
         <p:nvSpPr>
-          <p:cNvPr id="164" name="Google Shape;164;p27"/>
+          <p:cNvPr id="169" name="Google Shape;169;p28"/>
           <p:cNvSpPr txBox="1"/>
           <p:nvPr/>
         </p:nvSpPr>
@@ -10918,7 +11990,7 @@
     </p:bg>
     <p:spTree>
       <p:nvGrpSpPr>
-        <p:cNvPr id="1" name="Shape 168"/>
+        <p:cNvPr id="1" name="Shape 173"/>
         <p:cNvGrpSpPr/>
         <p:nvPr/>
       </p:nvGrpSpPr>
@@ -10932,7 +12004,7 @@
       </p:grpSpPr>
       <p:sp>
         <p:nvSpPr>
-          <p:cNvPr id="169" name="Google Shape;169;p28"/>
+          <p:cNvPr id="174" name="Google Shape;174;p29"/>
           <p:cNvSpPr txBox="1"/>
           <p:nvPr/>
         </p:nvSpPr>
@@ -10990,7 +12062,7 @@
       </p:sp>
       <p:sp>
         <p:nvSpPr>
-          <p:cNvPr id="170" name="Google Shape;170;p28"/>
+          <p:cNvPr id="175" name="Google Shape;175;p29"/>
           <p:cNvSpPr txBox="1"/>
           <p:nvPr/>
         </p:nvSpPr>
@@ -11075,7 +12147,7 @@
     </p:bg>
     <p:spTree>
       <p:nvGrpSpPr>
-        <p:cNvPr id="1" name="Shape 174"/>
+        <p:cNvPr id="1" name="Shape 179"/>
         <p:cNvGrpSpPr/>
         <p:nvPr/>
       </p:nvGrpSpPr>
@@ -11089,7 +12161,7 @@
       </p:grpSpPr>
       <p:sp>
         <p:nvSpPr>
-          <p:cNvPr id="175" name="Google Shape;175;p29"/>
+          <p:cNvPr id="180" name="Google Shape;180;p30"/>
           <p:cNvSpPr txBox="1"/>
           <p:nvPr/>
         </p:nvSpPr>
@@ -11147,7 +12219,7 @@
       </p:sp>
       <p:sp>
         <p:nvSpPr>
-          <p:cNvPr id="176" name="Google Shape;176;p29"/>
+          <p:cNvPr id="181" name="Google Shape;181;p30"/>
           <p:cNvSpPr txBox="1"/>
           <p:nvPr/>
         </p:nvSpPr>
@@ -11205,7 +12277,7 @@
       </p:sp>
       <p:sp>
         <p:nvSpPr>
-          <p:cNvPr id="177" name="Google Shape;177;p29"/>
+          <p:cNvPr id="182" name="Google Shape;182;p30"/>
           <p:cNvSpPr txBox="1"/>
           <p:nvPr/>
         </p:nvSpPr>
@@ -11287,7 +12359,7 @@
     </p:bg>
     <p:spTree>
       <p:nvGrpSpPr>
-        <p:cNvPr id="1" name="Shape 181"/>
+        <p:cNvPr id="1" name="Shape 186"/>
         <p:cNvGrpSpPr/>
         <p:nvPr/>
       </p:nvGrpSpPr>
@@ -11301,7 +12373,7 @@
       </p:grpSpPr>
       <p:sp>
         <p:nvSpPr>
-          <p:cNvPr id="182" name="Google Shape;182;p30"/>
+          <p:cNvPr id="187" name="Google Shape;187;p31"/>
           <p:cNvSpPr txBox="1"/>
           <p:nvPr/>
         </p:nvSpPr>
@@ -11359,7 +12431,7 @@
       </p:sp>
       <p:sp>
         <p:nvSpPr>
-          <p:cNvPr id="183" name="Google Shape;183;p30"/>
+          <p:cNvPr id="188" name="Google Shape;188;p31"/>
           <p:cNvSpPr txBox="1"/>
           <p:nvPr/>
         </p:nvSpPr>
@@ -11444,7 +12516,7 @@
     </p:bg>
     <p:spTree>
       <p:nvGrpSpPr>
-        <p:cNvPr id="1" name="Shape 187"/>
+        <p:cNvPr id="1" name="Shape 192"/>
         <p:cNvGrpSpPr/>
         <p:nvPr/>
       </p:nvGrpSpPr>
@@ -11458,7 +12530,7 @@
       </p:grpSpPr>
       <p:sp>
         <p:nvSpPr>
-          <p:cNvPr id="188" name="Google Shape;188;p31"/>
+          <p:cNvPr id="193" name="Google Shape;193;p32"/>
           <p:cNvSpPr txBox="1"/>
           <p:nvPr/>
         </p:nvSpPr>
@@ -11516,7 +12588,7 @@
       </p:sp>
       <p:sp>
         <p:nvSpPr>
-          <p:cNvPr id="189" name="Google Shape;189;p31"/>
+          <p:cNvPr id="194" name="Google Shape;194;p32"/>
           <p:cNvSpPr txBox="1"/>
           <p:nvPr/>
         </p:nvSpPr>
@@ -11601,7 +12673,7 @@
     </p:bg>
     <p:spTree>
       <p:nvGrpSpPr>
-        <p:cNvPr id="1" name="Shape 58"/>
+        <p:cNvPr id="1" name="Shape 62"/>
         <p:cNvGrpSpPr/>
         <p:nvPr/>
       </p:nvGrpSpPr>
@@ -11639,7 +12711,7 @@
     </p:bg>
     <p:spTree>
       <p:nvGrpSpPr>
-        <p:cNvPr id="1" name="Shape 193"/>
+        <p:cNvPr id="1" name="Shape 198"/>
         <p:cNvGrpSpPr/>
         <p:nvPr/>
       </p:nvGrpSpPr>
@@ -11653,7 +12725,7 @@
       </p:grpSpPr>
       <p:sp>
         <p:nvSpPr>
-          <p:cNvPr id="194" name="Google Shape;194;p32"/>
+          <p:cNvPr id="199" name="Google Shape;199;p33"/>
           <p:cNvSpPr txBox="1"/>
           <p:nvPr/>
         </p:nvSpPr>
@@ -11711,7 +12783,7 @@
       </p:sp>
       <p:sp>
         <p:nvSpPr>
-          <p:cNvPr id="195" name="Google Shape;195;p32"/>
+          <p:cNvPr id="200" name="Google Shape;200;p33"/>
           <p:cNvSpPr txBox="1"/>
           <p:nvPr/>
         </p:nvSpPr>
@@ -11796,7 +12868,7 @@
     </p:bg>
     <p:spTree>
       <p:nvGrpSpPr>
-        <p:cNvPr id="1" name="Shape 199"/>
+        <p:cNvPr id="1" name="Shape 204"/>
         <p:cNvGrpSpPr/>
         <p:nvPr/>
       </p:nvGrpSpPr>
@@ -11834,7 +12906,7 @@
     </p:bg>
     <p:spTree>
       <p:nvGrpSpPr>
-        <p:cNvPr id="1" name="Shape 203"/>
+        <p:cNvPr id="1" name="Shape 208"/>
         <p:cNvGrpSpPr/>
         <p:nvPr/>
       </p:nvGrpSpPr>
@@ -11848,7 +12920,7 @@
       </p:grpSpPr>
       <p:sp>
         <p:nvSpPr>
-          <p:cNvPr id="204" name="Google Shape;204;p34"/>
+          <p:cNvPr id="209" name="Google Shape;209;p35"/>
           <p:cNvSpPr txBox="1"/>
           <p:nvPr/>
         </p:nvSpPr>
@@ -11988,7 +13060,7 @@
       </p:sp>
       <p:sp>
         <p:nvSpPr>
-          <p:cNvPr id="205" name="Google Shape;205;p34"/>
+          <p:cNvPr id="210" name="Google Shape;210;p35"/>
           <p:cNvSpPr txBox="1"/>
           <p:nvPr/>
         </p:nvSpPr>
@@ -12152,7 +13224,7 @@
     </p:bg>
     <p:spTree>
       <p:nvGrpSpPr>
-        <p:cNvPr id="1" name="Shape 209"/>
+        <p:cNvPr id="1" name="Shape 214"/>
         <p:cNvGrpSpPr/>
         <p:nvPr/>
       </p:nvGrpSpPr>
@@ -12166,7 +13238,7 @@
       </p:grpSpPr>
       <p:sp>
         <p:nvSpPr>
-          <p:cNvPr id="210" name="Google Shape;210;p35"/>
+          <p:cNvPr id="215" name="Google Shape;215;p36"/>
           <p:cNvSpPr txBox="1"/>
           <p:nvPr/>
         </p:nvSpPr>
@@ -12657,7 +13729,7 @@
     </p:bg>
     <p:spTree>
       <p:nvGrpSpPr>
-        <p:cNvPr id="1" name="Shape 214"/>
+        <p:cNvPr id="1" name="Shape 219"/>
         <p:cNvGrpSpPr/>
         <p:nvPr/>
       </p:nvGrpSpPr>
@@ -12695,7 +13767,7 @@
     </p:bg>
     <p:spTree>
       <p:nvGrpSpPr>
-        <p:cNvPr id="1" name="Shape 218"/>
+        <p:cNvPr id="1" name="Shape 223"/>
         <p:cNvGrpSpPr/>
         <p:nvPr/>
       </p:nvGrpSpPr>
@@ -12709,7 +13781,7 @@
       </p:grpSpPr>
       <p:sp>
         <p:nvSpPr>
-          <p:cNvPr id="219" name="Google Shape;219;p37"/>
+          <p:cNvPr id="224" name="Google Shape;224;p38"/>
           <p:cNvSpPr txBox="1"/>
           <p:nvPr/>
         </p:nvSpPr>
@@ -12767,7 +13839,7 @@
       </p:sp>
       <p:sp>
         <p:nvSpPr>
-          <p:cNvPr id="220" name="Google Shape;220;p37"/>
+          <p:cNvPr id="225" name="Google Shape;225;p38"/>
           <p:cNvSpPr txBox="1"/>
           <p:nvPr/>
         </p:nvSpPr>
@@ -12825,7 +13897,7 @@
       </p:sp>
       <p:sp>
         <p:nvSpPr>
-          <p:cNvPr id="221" name="Google Shape;221;p37"/>
+          <p:cNvPr id="226" name="Google Shape;226;p38"/>
           <p:cNvSpPr txBox="1"/>
           <p:nvPr/>
         </p:nvSpPr>
@@ -12883,7 +13955,7 @@
       </p:sp>
       <p:sp>
         <p:nvSpPr>
-          <p:cNvPr id="222" name="Google Shape;222;p37"/>
+          <p:cNvPr id="227" name="Google Shape;227;p38"/>
           <p:cNvSpPr txBox="1"/>
           <p:nvPr/>
         </p:nvSpPr>
@@ -12941,7 +14013,7 @@
       </p:sp>
       <p:sp>
         <p:nvSpPr>
-          <p:cNvPr id="223" name="Google Shape;223;p37"/>
+          <p:cNvPr id="228" name="Google Shape;228;p38"/>
           <p:cNvSpPr txBox="1"/>
           <p:nvPr/>
         </p:nvSpPr>
@@ -12999,7 +14071,7 @@
       </p:sp>
       <p:sp>
         <p:nvSpPr>
-          <p:cNvPr id="224" name="Google Shape;224;p37"/>
+          <p:cNvPr id="229" name="Google Shape;229;p38"/>
           <p:cNvSpPr txBox="1"/>
           <p:nvPr/>
         </p:nvSpPr>
@@ -13057,7 +14129,7 @@
       </p:sp>
       <p:sp>
         <p:nvSpPr>
-          <p:cNvPr id="225" name="Google Shape;225;p37"/>
+          <p:cNvPr id="230" name="Google Shape;230;p38"/>
           <p:cNvSpPr txBox="1"/>
           <p:nvPr/>
         </p:nvSpPr>
@@ -13115,7 +14187,7 @@
       </p:sp>
       <p:sp>
         <p:nvSpPr>
-          <p:cNvPr id="226" name="Google Shape;226;p37"/>
+          <p:cNvPr id="231" name="Google Shape;231;p38"/>
           <p:cNvSpPr txBox="1"/>
           <p:nvPr/>
         </p:nvSpPr>
@@ -13173,7 +14245,7 @@
       </p:sp>
       <p:sp>
         <p:nvSpPr>
-          <p:cNvPr id="227" name="Google Shape;227;p37"/>
+          <p:cNvPr id="232" name="Google Shape;232;p38"/>
           <p:cNvSpPr txBox="1"/>
           <p:nvPr/>
         </p:nvSpPr>
@@ -13231,7 +14303,7 @@
       </p:sp>
       <p:sp>
         <p:nvSpPr>
-          <p:cNvPr id="228" name="Google Shape;228;p37"/>
+          <p:cNvPr id="233" name="Google Shape;233;p38"/>
           <p:cNvSpPr txBox="1"/>
           <p:nvPr/>
         </p:nvSpPr>
@@ -13289,7 +14361,7 @@
       </p:sp>
       <p:sp>
         <p:nvSpPr>
-          <p:cNvPr id="229" name="Google Shape;229;p37"/>
+          <p:cNvPr id="234" name="Google Shape;234;p38"/>
           <p:cNvSpPr txBox="1"/>
           <p:nvPr/>
         </p:nvSpPr>
@@ -13347,7 +14419,7 @@
       </p:sp>
       <p:sp>
         <p:nvSpPr>
-          <p:cNvPr id="230" name="Google Shape;230;p37"/>
+          <p:cNvPr id="235" name="Google Shape;235;p38"/>
           <p:cNvSpPr txBox="1"/>
           <p:nvPr/>
         </p:nvSpPr>
@@ -13405,7 +14477,7 @@
       </p:sp>
       <p:sp>
         <p:nvSpPr>
-          <p:cNvPr id="231" name="Google Shape;231;p37"/>
+          <p:cNvPr id="236" name="Google Shape;236;p38"/>
           <p:cNvSpPr txBox="1"/>
           <p:nvPr/>
         </p:nvSpPr>
@@ -13463,7 +14535,7 @@
       </p:sp>
       <p:sp>
         <p:nvSpPr>
-          <p:cNvPr id="232" name="Google Shape;232;p37"/>
+          <p:cNvPr id="237" name="Google Shape;237;p38"/>
           <p:cNvSpPr txBox="1"/>
           <p:nvPr/>
         </p:nvSpPr>
@@ -13521,7 +14593,7 @@
       </p:sp>
       <p:sp>
         <p:nvSpPr>
-          <p:cNvPr id="233" name="Google Shape;233;p37"/>
+          <p:cNvPr id="238" name="Google Shape;238;p38"/>
           <p:cNvSpPr txBox="1"/>
           <p:nvPr/>
         </p:nvSpPr>
@@ -13579,7 +14651,7 @@
       </p:sp>
       <p:sp>
         <p:nvSpPr>
-          <p:cNvPr id="234" name="Google Shape;234;p37"/>
+          <p:cNvPr id="239" name="Google Shape;239;p38"/>
           <p:cNvSpPr txBox="1"/>
           <p:nvPr/>
         </p:nvSpPr>
@@ -13637,7 +14709,7 @@
       </p:sp>
       <p:sp>
         <p:nvSpPr>
-          <p:cNvPr id="235" name="Google Shape;235;p37"/>
+          <p:cNvPr id="240" name="Google Shape;240;p38"/>
           <p:cNvSpPr txBox="1"/>
           <p:nvPr/>
         </p:nvSpPr>
@@ -13695,7 +14767,7 @@
       </p:sp>
       <p:sp>
         <p:nvSpPr>
-          <p:cNvPr id="236" name="Google Shape;236;p37"/>
+          <p:cNvPr id="241" name="Google Shape;241;p38"/>
           <p:cNvSpPr txBox="1"/>
           <p:nvPr/>
         </p:nvSpPr>
@@ -13753,7 +14825,7 @@
       </p:sp>
       <p:sp>
         <p:nvSpPr>
-          <p:cNvPr id="237" name="Google Shape;237;p37"/>
+          <p:cNvPr id="242" name="Google Shape;242;p38"/>
           <p:cNvSpPr txBox="1"/>
           <p:nvPr/>
         </p:nvSpPr>
@@ -13811,7 +14883,7 @@
       </p:sp>
       <p:sp>
         <p:nvSpPr>
-          <p:cNvPr id="238" name="Google Shape;238;p37"/>
+          <p:cNvPr id="243" name="Google Shape;243;p38"/>
           <p:cNvSpPr txBox="1"/>
           <p:nvPr/>
         </p:nvSpPr>
@@ -13869,7 +14941,7 @@
       </p:sp>
       <p:sp>
         <p:nvSpPr>
-          <p:cNvPr id="239" name="Google Shape;239;p37"/>
+          <p:cNvPr id="244" name="Google Shape;244;p38"/>
           <p:cNvSpPr txBox="1"/>
           <p:nvPr/>
         </p:nvSpPr>
@@ -13927,7 +14999,7 @@
       </p:sp>
       <p:sp>
         <p:nvSpPr>
-          <p:cNvPr id="240" name="Google Shape;240;p37"/>
+          <p:cNvPr id="245" name="Google Shape;245;p38"/>
           <p:cNvSpPr txBox="1"/>
           <p:nvPr/>
         </p:nvSpPr>
@@ -13985,7 +15057,7 @@
       </p:sp>
       <p:sp>
         <p:nvSpPr>
-          <p:cNvPr id="241" name="Google Shape;241;p37"/>
+          <p:cNvPr id="246" name="Google Shape;246;p38"/>
           <p:cNvSpPr txBox="1"/>
           <p:nvPr/>
         </p:nvSpPr>
@@ -14043,7 +15115,7 @@
       </p:sp>
       <p:sp>
         <p:nvSpPr>
-          <p:cNvPr id="242" name="Google Shape;242;p37"/>
+          <p:cNvPr id="247" name="Google Shape;247;p38"/>
           <p:cNvSpPr txBox="1"/>
           <p:nvPr/>
         </p:nvSpPr>
@@ -14125,7 +15197,7 @@
     </p:bg>
     <p:spTree>
       <p:nvGrpSpPr>
-        <p:cNvPr id="1" name="Shape 246"/>
+        <p:cNvPr id="1" name="Shape 251"/>
         <p:cNvGrpSpPr/>
         <p:nvPr/>
       </p:nvGrpSpPr>
@@ -14139,7 +15211,7 @@
       </p:grpSpPr>
       <p:sp>
         <p:nvSpPr>
-          <p:cNvPr id="247" name="Google Shape;247;p38"/>
+          <p:cNvPr id="252" name="Google Shape;252;p39"/>
           <p:cNvSpPr txBox="1"/>
           <p:nvPr/>
         </p:nvSpPr>
@@ -14197,7 +15269,7 @@
       </p:sp>
       <p:sp>
         <p:nvSpPr>
-          <p:cNvPr id="248" name="Google Shape;248;p38"/>
+          <p:cNvPr id="253" name="Google Shape;253;p39"/>
           <p:cNvSpPr txBox="1"/>
           <p:nvPr/>
         </p:nvSpPr>
@@ -14255,7 +15327,7 @@
       </p:sp>
       <p:sp>
         <p:nvSpPr>
-          <p:cNvPr id="249" name="Google Shape;249;p38"/>
+          <p:cNvPr id="254" name="Google Shape;254;p39"/>
           <p:cNvSpPr txBox="1"/>
           <p:nvPr/>
         </p:nvSpPr>
@@ -14316,7 +15388,7 @@
       </p:sp>
       <p:sp>
         <p:nvSpPr>
-          <p:cNvPr id="250" name="Google Shape;250;p38"/>
+          <p:cNvPr id="255" name="Google Shape;255;p39"/>
           <p:cNvSpPr txBox="1"/>
           <p:nvPr/>
         </p:nvSpPr>
@@ -14374,7 +15446,7 @@
       </p:sp>
       <p:sp>
         <p:nvSpPr>
-          <p:cNvPr id="251" name="Google Shape;251;p38"/>
+          <p:cNvPr id="256" name="Google Shape;256;p39"/>
           <p:cNvSpPr txBox="1"/>
           <p:nvPr/>
         </p:nvSpPr>
@@ -14432,7 +15504,7 @@
       </p:sp>
       <p:sp>
         <p:nvSpPr>
-          <p:cNvPr id="252" name="Google Shape;252;p38"/>
+          <p:cNvPr id="257" name="Google Shape;257;p39"/>
           <p:cNvSpPr txBox="1"/>
           <p:nvPr/>
         </p:nvSpPr>
@@ -14517,7 +15589,7 @@
     </p:bg>
     <p:spTree>
       <p:nvGrpSpPr>
-        <p:cNvPr id="1" name="Shape 256"/>
+        <p:cNvPr id="1" name="Shape 261"/>
         <p:cNvGrpSpPr/>
         <p:nvPr/>
       </p:nvGrpSpPr>
@@ -14531,7 +15603,7 @@
       </p:grpSpPr>
       <p:sp>
         <p:nvSpPr>
-          <p:cNvPr id="257" name="Google Shape;257;p39"/>
+          <p:cNvPr id="262" name="Google Shape;262;p40"/>
           <p:cNvSpPr txBox="1"/>
           <p:nvPr/>
         </p:nvSpPr>
@@ -14589,7 +15661,7 @@
       </p:sp>
       <p:sp>
         <p:nvSpPr>
-          <p:cNvPr id="258" name="Google Shape;258;p39"/>
+          <p:cNvPr id="263" name="Google Shape;263;p40"/>
           <p:cNvSpPr txBox="1"/>
           <p:nvPr/>
         </p:nvSpPr>
@@ -14647,7 +15719,7 @@
       </p:sp>
       <p:sp>
         <p:nvSpPr>
-          <p:cNvPr id="259" name="Google Shape;259;p39"/>
+          <p:cNvPr id="264" name="Google Shape;264;p40"/>
           <p:cNvSpPr txBox="1"/>
           <p:nvPr/>
         </p:nvSpPr>
@@ -14708,7 +15780,7 @@
       </p:sp>
       <p:sp>
         <p:nvSpPr>
-          <p:cNvPr id="260" name="Google Shape;260;p39"/>
+          <p:cNvPr id="265" name="Google Shape;265;p40"/>
           <p:cNvSpPr txBox="1"/>
           <p:nvPr/>
         </p:nvSpPr>
@@ -14766,7 +15838,7 @@
       </p:sp>
       <p:sp>
         <p:nvSpPr>
-          <p:cNvPr id="261" name="Google Shape;261;p39"/>
+          <p:cNvPr id="266" name="Google Shape;266;p40"/>
           <p:cNvSpPr txBox="1"/>
           <p:nvPr/>
         </p:nvSpPr>
@@ -14824,7 +15896,7 @@
       </p:sp>
       <p:sp>
         <p:nvSpPr>
-          <p:cNvPr id="262" name="Google Shape;262;p39"/>
+          <p:cNvPr id="267" name="Google Shape;267;p40"/>
           <p:cNvSpPr txBox="1"/>
           <p:nvPr/>
         </p:nvSpPr>
@@ -14909,7 +15981,7 @@
     </p:bg>
     <p:spTree>
       <p:nvGrpSpPr>
-        <p:cNvPr id="1" name="Shape 266"/>
+        <p:cNvPr id="1" name="Shape 271"/>
         <p:cNvGrpSpPr/>
         <p:nvPr/>
       </p:nvGrpSpPr>
@@ -14923,7 +15995,7 @@
       </p:grpSpPr>
       <p:sp>
         <p:nvSpPr>
-          <p:cNvPr id="267" name="Google Shape;267;p40"/>
+          <p:cNvPr id="272" name="Google Shape;272;p41"/>
           <p:cNvSpPr txBox="1"/>
           <p:nvPr/>
         </p:nvSpPr>
@@ -14981,7 +16053,7 @@
       </p:sp>
       <p:sp>
         <p:nvSpPr>
-          <p:cNvPr id="268" name="Google Shape;268;p40"/>
+          <p:cNvPr id="273" name="Google Shape;273;p41"/>
           <p:cNvSpPr txBox="1"/>
           <p:nvPr/>
         </p:nvSpPr>
@@ -15039,7 +16111,7 @@
       </p:sp>
       <p:sp>
         <p:nvSpPr>
-          <p:cNvPr id="269" name="Google Shape;269;p40"/>
+          <p:cNvPr id="274" name="Google Shape;274;p41"/>
           <p:cNvSpPr txBox="1"/>
           <p:nvPr/>
         </p:nvSpPr>
@@ -15100,7 +16172,7 @@
       </p:sp>
       <p:sp>
         <p:nvSpPr>
-          <p:cNvPr id="270" name="Google Shape;270;p40"/>
+          <p:cNvPr id="275" name="Google Shape;275;p41"/>
           <p:cNvSpPr txBox="1"/>
           <p:nvPr/>
         </p:nvSpPr>
@@ -15158,7 +16230,7 @@
       </p:sp>
       <p:sp>
         <p:nvSpPr>
-          <p:cNvPr id="271" name="Google Shape;271;p40"/>
+          <p:cNvPr id="276" name="Google Shape;276;p41"/>
           <p:cNvSpPr txBox="1"/>
           <p:nvPr/>
         </p:nvSpPr>
@@ -15216,7 +16288,7 @@
       </p:sp>
       <p:sp>
         <p:nvSpPr>
-          <p:cNvPr id="272" name="Google Shape;272;p40"/>
+          <p:cNvPr id="277" name="Google Shape;277;p41"/>
           <p:cNvSpPr txBox="1"/>
           <p:nvPr/>
         </p:nvSpPr>
@@ -15301,7 +16373,7 @@
     </p:bg>
     <p:spTree>
       <p:nvGrpSpPr>
-        <p:cNvPr id="1" name="Shape 276"/>
+        <p:cNvPr id="1" name="Shape 281"/>
         <p:cNvGrpSpPr/>
         <p:nvPr/>
       </p:nvGrpSpPr>
@@ -15315,7 +16387,7 @@
       </p:grpSpPr>
       <p:sp>
         <p:nvSpPr>
-          <p:cNvPr id="277" name="Google Shape;277;p41"/>
+          <p:cNvPr id="282" name="Google Shape;282;p42"/>
           <p:cNvSpPr txBox="1"/>
           <p:nvPr/>
         </p:nvSpPr>
@@ -15373,7 +16445,7 @@
       </p:sp>
       <p:sp>
         <p:nvSpPr>
-          <p:cNvPr id="278" name="Google Shape;278;p41"/>
+          <p:cNvPr id="283" name="Google Shape;283;p42"/>
           <p:cNvSpPr txBox="1"/>
           <p:nvPr/>
         </p:nvSpPr>
@@ -15431,7 +16503,7 @@
       </p:sp>
       <p:sp>
         <p:nvSpPr>
-          <p:cNvPr id="279" name="Google Shape;279;p41"/>
+          <p:cNvPr id="284" name="Google Shape;284;p42"/>
           <p:cNvSpPr txBox="1"/>
           <p:nvPr/>
         </p:nvSpPr>
@@ -15492,7 +16564,7 @@
       </p:sp>
       <p:sp>
         <p:nvSpPr>
-          <p:cNvPr id="280" name="Google Shape;280;p41"/>
+          <p:cNvPr id="285" name="Google Shape;285;p42"/>
           <p:cNvSpPr txBox="1"/>
           <p:nvPr/>
         </p:nvSpPr>
@@ -15550,7 +16622,7 @@
       </p:sp>
       <p:sp>
         <p:nvSpPr>
-          <p:cNvPr id="281" name="Google Shape;281;p41"/>
+          <p:cNvPr id="286" name="Google Shape;286;p42"/>
           <p:cNvSpPr txBox="1"/>
           <p:nvPr/>
         </p:nvSpPr>
@@ -15608,7 +16680,7 @@
       </p:sp>
       <p:sp>
         <p:nvSpPr>
-          <p:cNvPr id="282" name="Google Shape;282;p41"/>
+          <p:cNvPr id="287" name="Google Shape;287;p42"/>
           <p:cNvSpPr txBox="1"/>
           <p:nvPr/>
         </p:nvSpPr>
@@ -15693,7 +16765,7 @@
     </p:bg>
     <p:spTree>
       <p:nvGrpSpPr>
-        <p:cNvPr id="1" name="Shape 62"/>
+        <p:cNvPr id="1" name="Shape 66"/>
         <p:cNvGrpSpPr/>
         <p:nvPr/>
       </p:nvGrpSpPr>
@@ -15731,7 +16803,7 @@
     </p:bg>
     <p:spTree>
       <p:nvGrpSpPr>
-        <p:cNvPr id="1" name="Shape 286"/>
+        <p:cNvPr id="1" name="Shape 291"/>
         <p:cNvGrpSpPr/>
         <p:nvPr/>
       </p:nvGrpSpPr>
@@ -15745,13 +16817,13 @@
       </p:grpSpPr>
       <p:sp>
         <p:nvSpPr>
-          <p:cNvPr id="287" name="Google Shape;287;p42"/>
+          <p:cNvPr id="292" name="Google Shape;292;p43"/>
           <p:cNvSpPr txBox="1"/>
           <p:nvPr/>
         </p:nvSpPr>
         <p:spPr>
           <a:xfrm>
-            <a:off x="999775" y="2776425"/>
+            <a:off x="966125" y="2735425"/>
             <a:ext cx="8406600" cy="567600"/>
           </a:xfrm>
           <a:prstGeom prst="rect">
@@ -15786,7 +16858,7 @@
               <a:buNone/>
             </a:pPr>
             <a:r>
-              <a:rPr lang="en" sz="2483" b="1">
+              <a:rPr lang="en" sz="2483" b="1" dirty="0">
                 <a:solidFill>
                   <a:schemeClr val="dk1"/>
                 </a:solidFill>
@@ -15797,7 +16869,7 @@
               </a:rPr>
               <a:t>&lt;&lt;AE Carrera 01 v2&gt;&gt;</a:t>
             </a:r>
-            <a:endParaRPr sz="3483">
+            <a:endParaRPr sz="3483" dirty="0">
               <a:solidFill>
                 <a:schemeClr val="dk2"/>
               </a:solidFill>
@@ -15807,7 +16879,7 @@
       </p:sp>
       <p:sp>
         <p:nvSpPr>
-          <p:cNvPr id="288" name="Google Shape;288;p42"/>
+          <p:cNvPr id="293" name="Google Shape;293;p43"/>
           <p:cNvSpPr txBox="1"/>
           <p:nvPr/>
         </p:nvSpPr>
@@ -15843,7 +16915,7 @@
               <a:buNone/>
             </a:pPr>
             <a:r>
-              <a:rPr lang="en" sz="2483" b="1">
+              <a:rPr lang="en" sz="2483" b="1" dirty="0">
                 <a:solidFill>
                   <a:schemeClr val="dk1"/>
                 </a:solidFill>
@@ -15854,7 +16926,7 @@
               </a:rPr>
               <a:t>&lt;&lt;AE Carrera 02 v2&gt;&gt;</a:t>
             </a:r>
-            <a:endParaRPr sz="3483">
+            <a:endParaRPr sz="3483" dirty="0">
               <a:solidFill>
                 <a:schemeClr val="dk2"/>
               </a:solidFill>
@@ -15864,7 +16936,7 @@
       </p:sp>
       <p:sp>
         <p:nvSpPr>
-          <p:cNvPr id="289" name="Google Shape;289;p42"/>
+          <p:cNvPr id="294" name="Google Shape;294;p43"/>
           <p:cNvSpPr txBox="1"/>
           <p:nvPr/>
         </p:nvSpPr>
@@ -15921,7 +16993,7 @@
       </p:sp>
       <p:sp>
         <p:nvSpPr>
-          <p:cNvPr id="290" name="Google Shape;290;p42"/>
+          <p:cNvPr id="295" name="Google Shape;295;p43"/>
           <p:cNvSpPr txBox="1"/>
           <p:nvPr/>
         </p:nvSpPr>
@@ -16002,7 +17074,7 @@
     </p:bg>
     <p:spTree>
       <p:nvGrpSpPr>
-        <p:cNvPr id="1" name="Shape 294"/>
+        <p:cNvPr id="1" name="Shape 299"/>
         <p:cNvGrpSpPr/>
         <p:nvPr/>
       </p:nvGrpSpPr>
@@ -16040,7 +17112,7 @@
     </p:bg>
     <p:spTree>
       <p:nvGrpSpPr>
-        <p:cNvPr id="1" name="Shape 298"/>
+        <p:cNvPr id="1" name="Shape 303"/>
         <p:cNvGrpSpPr/>
         <p:nvPr/>
       </p:nvGrpSpPr>
@@ -16054,7 +17126,7 @@
       </p:grpSpPr>
       <p:sp>
         <p:nvSpPr>
-          <p:cNvPr id="299" name="Google Shape;299;p44"/>
+          <p:cNvPr id="304" name="Google Shape;304;p45"/>
           <p:cNvSpPr txBox="1"/>
           <p:nvPr/>
         </p:nvSpPr>
@@ -16120,7 +17192,7 @@
       </p:sp>
       <p:sp>
         <p:nvSpPr>
-          <p:cNvPr id="300" name="Google Shape;300;p44"/>
+          <p:cNvPr id="305" name="Google Shape;305;p45"/>
           <p:cNvSpPr txBox="1"/>
           <p:nvPr/>
         </p:nvSpPr>
@@ -16228,7 +17300,7 @@
     </p:bg>
     <p:spTree>
       <p:nvGrpSpPr>
-        <p:cNvPr id="1" name="Shape 304"/>
+        <p:cNvPr id="1" name="Shape 309"/>
         <p:cNvGrpSpPr/>
         <p:nvPr/>
       </p:nvGrpSpPr>
@@ -16242,7 +17314,7 @@
       </p:grpSpPr>
       <p:sp>
         <p:nvSpPr>
-          <p:cNvPr id="305" name="Google Shape;305;p45"/>
+          <p:cNvPr id="310" name="Google Shape;310;p46"/>
           <p:cNvSpPr txBox="1"/>
           <p:nvPr/>
         </p:nvSpPr>
@@ -16304,7 +17376,7 @@
       </p:sp>
       <p:sp>
         <p:nvSpPr>
-          <p:cNvPr id="306" name="Google Shape;306;p45"/>
+          <p:cNvPr id="311" name="Google Shape;311;p46"/>
           <p:cNvSpPr txBox="1"/>
           <p:nvPr/>
         </p:nvSpPr>
@@ -16412,7 +17484,7 @@
     </p:bg>
     <p:spTree>
       <p:nvGrpSpPr>
-        <p:cNvPr id="1" name="Shape 310"/>
+        <p:cNvPr id="1" name="Shape 315"/>
         <p:cNvGrpSpPr/>
         <p:nvPr/>
       </p:nvGrpSpPr>
@@ -16426,7 +17498,7 @@
       </p:grpSpPr>
       <p:sp>
         <p:nvSpPr>
-          <p:cNvPr id="311" name="Google Shape;311;p46"/>
+          <p:cNvPr id="316" name="Google Shape;316;p47"/>
           <p:cNvSpPr txBox="1"/>
           <p:nvPr/>
         </p:nvSpPr>
@@ -16488,7 +17560,7 @@
       </p:sp>
       <p:sp>
         <p:nvSpPr>
-          <p:cNvPr id="312" name="Google Shape;312;p46"/>
+          <p:cNvPr id="317" name="Google Shape;317;p47"/>
           <p:cNvSpPr txBox="1"/>
           <p:nvPr/>
         </p:nvSpPr>
@@ -16596,7 +17668,7 @@
     </p:bg>
     <p:spTree>
       <p:nvGrpSpPr>
-        <p:cNvPr id="1" name="Shape 316"/>
+        <p:cNvPr id="1" name="Shape 321"/>
         <p:cNvGrpSpPr/>
         <p:nvPr/>
       </p:nvGrpSpPr>
@@ -16610,7 +17682,7 @@
       </p:grpSpPr>
       <p:sp>
         <p:nvSpPr>
-          <p:cNvPr id="317" name="Google Shape;317;p47"/>
+          <p:cNvPr id="322" name="Google Shape;322;p48"/>
           <p:cNvSpPr txBox="1"/>
           <p:nvPr/>
         </p:nvSpPr>
@@ -16672,7 +17744,7 @@
       </p:sp>
       <p:sp>
         <p:nvSpPr>
-          <p:cNvPr id="318" name="Google Shape;318;p47"/>
+          <p:cNvPr id="323" name="Google Shape;323;p48"/>
           <p:cNvSpPr txBox="1"/>
           <p:nvPr/>
         </p:nvSpPr>
@@ -16780,7 +17852,7 @@
     </p:bg>
     <p:spTree>
       <p:nvGrpSpPr>
-        <p:cNvPr id="1" name="Shape 322"/>
+        <p:cNvPr id="1" name="Shape 327"/>
         <p:cNvGrpSpPr/>
         <p:nvPr/>
       </p:nvGrpSpPr>
@@ -16818,7 +17890,7 @@
     </p:bg>
     <p:spTree>
       <p:nvGrpSpPr>
-        <p:cNvPr id="1" name="Shape 326"/>
+        <p:cNvPr id="1" name="Shape 331"/>
         <p:cNvGrpSpPr/>
         <p:nvPr/>
       </p:nvGrpSpPr>
@@ -16832,7 +17904,7 @@
       </p:grpSpPr>
       <p:sp>
         <p:nvSpPr>
-          <p:cNvPr id="327" name="Google Shape;327;p49"/>
+          <p:cNvPr id="332" name="Google Shape;332;p50"/>
           <p:cNvSpPr txBox="1"/>
           <p:nvPr/>
         </p:nvSpPr>
@@ -16893,7 +17965,7 @@
       </p:sp>
       <p:cxnSp>
         <p:nvCxnSpPr>
-          <p:cNvPr id="328" name="Google Shape;328;p49"/>
+          <p:cNvPr id="333" name="Google Shape;333;p50"/>
           <p:cNvCxnSpPr/>
           <p:nvPr/>
         </p:nvCxnSpPr>
@@ -16919,7 +17991,7 @@
       </p:cxnSp>
       <p:sp>
         <p:nvSpPr>
-          <p:cNvPr id="329" name="Google Shape;329;p49"/>
+          <p:cNvPr id="334" name="Google Shape;334;p50"/>
           <p:cNvSpPr txBox="1"/>
           <p:nvPr/>
         </p:nvSpPr>
@@ -16938,7 +18010,7 @@
         </p:spPr>
         <p:txBody>
           <a:bodyPr spcFirstLastPara="1" wrap="square" lIns="91425" tIns="91425" rIns="91425" bIns="91425" anchor="t" anchorCtr="0">
-            <a:normAutofit fontScale="92500" lnSpcReduction="10000"/>
+            <a:normAutofit/>
           </a:bodyPr>
           <a:lstStyle/>
           <a:p>
@@ -17004,7 +18076,7 @@
     </p:bg>
     <p:spTree>
       <p:nvGrpSpPr>
-        <p:cNvPr id="1" name="Shape 333"/>
+        <p:cNvPr id="1" name="Shape 338"/>
         <p:cNvGrpSpPr/>
         <p:nvPr/>
       </p:nvGrpSpPr>
@@ -17018,7 +18090,7 @@
       </p:grpSpPr>
       <p:sp>
         <p:nvSpPr>
-          <p:cNvPr id="334" name="Google Shape;334;p50"/>
+          <p:cNvPr id="339" name="Google Shape;339;p51"/>
           <p:cNvSpPr txBox="1"/>
           <p:nvPr/>
         </p:nvSpPr>
@@ -17079,7 +18151,7 @@
       </p:sp>
       <p:cxnSp>
         <p:nvCxnSpPr>
-          <p:cNvPr id="335" name="Google Shape;335;p50"/>
+          <p:cNvPr id="340" name="Google Shape;340;p51"/>
           <p:cNvCxnSpPr/>
           <p:nvPr/>
         </p:nvCxnSpPr>
@@ -17105,7 +18177,7 @@
       </p:cxnSp>
       <p:sp>
         <p:nvSpPr>
-          <p:cNvPr id="336" name="Google Shape;336;p50"/>
+          <p:cNvPr id="341" name="Google Shape;341;p51"/>
           <p:cNvSpPr txBox="1"/>
           <p:nvPr/>
         </p:nvSpPr>
@@ -17166,7 +18238,7 @@
       </p:sp>
       <p:cxnSp>
         <p:nvCxnSpPr>
-          <p:cNvPr id="337" name="Google Shape;337;p50"/>
+          <p:cNvPr id="342" name="Google Shape;342;p51"/>
           <p:cNvCxnSpPr/>
           <p:nvPr/>
         </p:nvCxnSpPr>
@@ -17192,7 +18264,7 @@
       </p:cxnSp>
       <p:sp>
         <p:nvSpPr>
-          <p:cNvPr id="338" name="Google Shape;338;p50"/>
+          <p:cNvPr id="343" name="Google Shape;343;p51"/>
           <p:cNvSpPr txBox="1"/>
           <p:nvPr/>
         </p:nvSpPr>
@@ -17211,7 +18283,7 @@
         </p:spPr>
         <p:txBody>
           <a:bodyPr spcFirstLastPara="1" wrap="square" lIns="91425" tIns="91425" rIns="91425" bIns="91425" anchor="t" anchorCtr="0">
-            <a:normAutofit fontScale="92500" lnSpcReduction="10000"/>
+            <a:normAutofit/>
           </a:bodyPr>
           <a:lstStyle/>
           <a:p>
@@ -17253,7 +18325,7 @@
       </p:sp>
       <p:sp>
         <p:nvSpPr>
-          <p:cNvPr id="339" name="Google Shape;339;p50"/>
+          <p:cNvPr id="344" name="Google Shape;344;p51"/>
           <p:cNvSpPr txBox="1"/>
           <p:nvPr/>
         </p:nvSpPr>
@@ -17272,7 +18344,7 @@
         </p:spPr>
         <p:txBody>
           <a:bodyPr spcFirstLastPara="1" wrap="square" lIns="91425" tIns="91425" rIns="91425" bIns="91425" anchor="t" anchorCtr="0">
-            <a:normAutofit fontScale="92500" lnSpcReduction="10000"/>
+            <a:normAutofit/>
           </a:bodyPr>
           <a:lstStyle/>
           <a:p>
@@ -17338,7 +18410,7 @@
     </p:bg>
     <p:spTree>
       <p:nvGrpSpPr>
-        <p:cNvPr id="1" name="Shape 343"/>
+        <p:cNvPr id="1" name="Shape 348"/>
         <p:cNvGrpSpPr/>
         <p:nvPr/>
       </p:nvGrpSpPr>
@@ -17352,7 +18424,7 @@
       </p:grpSpPr>
       <p:sp>
         <p:nvSpPr>
-          <p:cNvPr id="344" name="Google Shape;344;p51"/>
+          <p:cNvPr id="349" name="Google Shape;349;p52"/>
           <p:cNvSpPr txBox="1"/>
           <p:nvPr/>
         </p:nvSpPr>
@@ -17438,7 +18510,7 @@
       </p:sp>
       <p:sp>
         <p:nvSpPr>
-          <p:cNvPr id="345" name="Google Shape;345;p51"/>
+          <p:cNvPr id="350" name="Google Shape;350;p52"/>
           <p:cNvSpPr txBox="1"/>
           <p:nvPr/>
         </p:nvSpPr>
@@ -17548,7 +18620,7 @@
     </p:bg>
     <p:spTree>
       <p:nvGrpSpPr>
-        <p:cNvPr id="1" name="Shape 66"/>
+        <p:cNvPr id="1" name="Shape 70"/>
         <p:cNvGrpSpPr/>
         <p:nvPr/>
       </p:nvGrpSpPr>
@@ -17562,7 +18634,7 @@
       </p:grpSpPr>
       <p:sp>
         <p:nvSpPr>
-          <p:cNvPr id="67" name="Google Shape;67;p16"/>
+          <p:cNvPr id="71" name="Google Shape;71;p17"/>
           <p:cNvSpPr txBox="1"/>
           <p:nvPr/>
         </p:nvSpPr>
@@ -17620,7 +18692,7 @@
       </p:sp>
       <p:sp>
         <p:nvSpPr>
-          <p:cNvPr id="68" name="Google Shape;68;p16"/>
+          <p:cNvPr id="72" name="Google Shape;72;p17"/>
           <p:cNvSpPr txBox="1"/>
           <p:nvPr/>
         </p:nvSpPr>
@@ -17678,7 +18750,7 @@
       </p:sp>
       <p:sp>
         <p:nvSpPr>
-          <p:cNvPr id="69" name="Google Shape;69;p16"/>
+          <p:cNvPr id="73" name="Google Shape;73;p17"/>
           <p:cNvSpPr txBox="1"/>
           <p:nvPr/>
         </p:nvSpPr>
@@ -17736,7 +18808,7 @@
       </p:sp>
       <p:sp>
         <p:nvSpPr>
-          <p:cNvPr id="70" name="Google Shape;70;p16"/>
+          <p:cNvPr id="74" name="Google Shape;74;p17"/>
           <p:cNvSpPr txBox="1"/>
           <p:nvPr/>
         </p:nvSpPr>
@@ -17794,7 +18866,7 @@
       </p:sp>
       <p:sp>
         <p:nvSpPr>
-          <p:cNvPr id="71" name="Google Shape;71;p16"/>
+          <p:cNvPr id="75" name="Google Shape;75;p17"/>
           <p:cNvSpPr txBox="1"/>
           <p:nvPr/>
         </p:nvSpPr>
@@ -17852,7 +18924,7 @@
       </p:sp>
       <p:sp>
         <p:nvSpPr>
-          <p:cNvPr id="72" name="Google Shape;72;p16"/>
+          <p:cNvPr id="76" name="Google Shape;76;p17"/>
           <p:cNvSpPr txBox="1"/>
           <p:nvPr/>
         </p:nvSpPr>
@@ -17910,7 +18982,7 @@
       </p:sp>
       <p:sp>
         <p:nvSpPr>
-          <p:cNvPr id="73" name="Google Shape;73;p16"/>
+          <p:cNvPr id="77" name="Google Shape;77;p17"/>
           <p:cNvSpPr txBox="1"/>
           <p:nvPr/>
         </p:nvSpPr>
@@ -17968,7 +19040,7 @@
       </p:sp>
       <p:sp>
         <p:nvSpPr>
-          <p:cNvPr id="74" name="Google Shape;74;p16"/>
+          <p:cNvPr id="78" name="Google Shape;78;p17"/>
           <p:cNvSpPr txBox="1"/>
           <p:nvPr/>
         </p:nvSpPr>
@@ -18026,7 +19098,7 @@
       </p:sp>
       <p:sp>
         <p:nvSpPr>
-          <p:cNvPr id="75" name="Google Shape;75;p16"/>
+          <p:cNvPr id="79" name="Google Shape;79;p17"/>
           <p:cNvSpPr txBox="1"/>
           <p:nvPr/>
         </p:nvSpPr>
@@ -18084,7 +19156,7 @@
       </p:sp>
       <p:sp>
         <p:nvSpPr>
-          <p:cNvPr id="76" name="Google Shape;76;p16"/>
+          <p:cNvPr id="80" name="Google Shape;80;p17"/>
           <p:cNvSpPr txBox="1"/>
           <p:nvPr/>
         </p:nvSpPr>
@@ -18142,7 +19214,7 @@
       </p:sp>
       <p:sp>
         <p:nvSpPr>
-          <p:cNvPr id="77" name="Google Shape;77;p16"/>
+          <p:cNvPr id="81" name="Google Shape;81;p17"/>
           <p:cNvSpPr txBox="1"/>
           <p:nvPr/>
         </p:nvSpPr>
@@ -18200,7 +19272,7 @@
       </p:sp>
       <p:sp>
         <p:nvSpPr>
-          <p:cNvPr id="78" name="Google Shape;78;p16"/>
+          <p:cNvPr id="82" name="Google Shape;82;p17"/>
           <p:cNvSpPr txBox="1"/>
           <p:nvPr/>
         </p:nvSpPr>
@@ -18258,7 +19330,7 @@
       </p:sp>
       <p:sp>
         <p:nvSpPr>
-          <p:cNvPr id="79" name="Google Shape;79;p16"/>
+          <p:cNvPr id="83" name="Google Shape;83;p17"/>
           <p:cNvSpPr txBox="1"/>
           <p:nvPr/>
         </p:nvSpPr>
@@ -18316,7 +19388,7 @@
       </p:sp>
       <p:sp>
         <p:nvSpPr>
-          <p:cNvPr id="80" name="Google Shape;80;p16"/>
+          <p:cNvPr id="84" name="Google Shape;84;p17"/>
           <p:cNvSpPr txBox="1"/>
           <p:nvPr/>
         </p:nvSpPr>
@@ -18374,7 +19446,7 @@
       </p:sp>
       <p:sp>
         <p:nvSpPr>
-          <p:cNvPr id="81" name="Google Shape;81;p16"/>
+          <p:cNvPr id="85" name="Google Shape;85;p17"/>
           <p:cNvSpPr txBox="1"/>
           <p:nvPr/>
         </p:nvSpPr>
@@ -18432,7 +19504,7 @@
       </p:sp>
       <p:sp>
         <p:nvSpPr>
-          <p:cNvPr id="82" name="Google Shape;82;p16"/>
+          <p:cNvPr id="86" name="Google Shape;86;p17"/>
           <p:cNvSpPr txBox="1"/>
           <p:nvPr/>
         </p:nvSpPr>
@@ -18490,7 +19562,7 @@
       </p:sp>
       <p:sp>
         <p:nvSpPr>
-          <p:cNvPr id="83" name="Google Shape;83;p16"/>
+          <p:cNvPr id="87" name="Google Shape;87;p17"/>
           <p:cNvSpPr txBox="1"/>
           <p:nvPr/>
         </p:nvSpPr>
@@ -18548,7 +19620,7 @@
       </p:sp>
       <p:sp>
         <p:nvSpPr>
-          <p:cNvPr id="84" name="Google Shape;84;p16"/>
+          <p:cNvPr id="88" name="Google Shape;88;p17"/>
           <p:cNvSpPr txBox="1"/>
           <p:nvPr/>
         </p:nvSpPr>
@@ -18591,354 +19663,6 @@
                 <a:sym typeface="Public Sans"/>
               </a:rPr>
               <a:t>&lt;&lt;% AE 06&gt;&gt;</a:t>
-            </a:r>
-            <a:endParaRPr sz="1900" b="1">
-              <a:solidFill>
-                <a:srgbClr val="434343"/>
-              </a:solidFill>
-              <a:latin typeface="Public Sans"/>
-              <a:ea typeface="Public Sans"/>
-              <a:cs typeface="Public Sans"/>
-              <a:sym typeface="Public Sans"/>
-            </a:endParaRPr>
-          </a:p>
-        </p:txBody>
-      </p:sp>
-      <p:sp>
-        <p:nvSpPr>
-          <p:cNvPr id="85" name="Google Shape;85;p16"/>
-          <p:cNvSpPr txBox="1"/>
-          <p:nvPr/>
-        </p:nvSpPr>
-        <p:spPr>
-          <a:xfrm>
-            <a:off x="1537374" y="12688550"/>
-            <a:ext cx="7069200" cy="477000"/>
-          </a:xfrm>
-          <a:prstGeom prst="rect">
-            <a:avLst/>
-          </a:prstGeom>
-          <a:noFill/>
-          <a:ln>
-            <a:noFill/>
-          </a:ln>
-        </p:spPr>
-        <p:txBody>
-          <a:bodyPr spcFirstLastPara="1" wrap="square" lIns="91425" tIns="91425" rIns="91425" bIns="91425" anchor="t" anchorCtr="0">
-            <a:spAutoFit/>
-          </a:bodyPr>
-          <a:lstStyle/>
-          <a:p>
-            <a:pPr marL="0" lvl="0" indent="0" algn="l" rtl="0">
-              <a:spcBef>
-                <a:spcPts val="0"/>
-              </a:spcBef>
-              <a:spcAft>
-                <a:spcPts val="0"/>
-              </a:spcAft>
-              <a:buNone/>
-            </a:pPr>
-            <a:r>
-              <a:rPr lang="en" sz="1900">
-                <a:solidFill>
-                  <a:srgbClr val="434343"/>
-                </a:solidFill>
-                <a:latin typeface="Public Sans"/>
-                <a:ea typeface="Public Sans"/>
-                <a:cs typeface="Public Sans"/>
-                <a:sym typeface="Public Sans"/>
-              </a:rPr>
-              <a:t>&lt;&lt;URL AE 07&gt;&gt;</a:t>
-            </a:r>
-            <a:endParaRPr sz="1900">
-              <a:solidFill>
-                <a:srgbClr val="434343"/>
-              </a:solidFill>
-              <a:latin typeface="Public Sans"/>
-              <a:ea typeface="Public Sans"/>
-              <a:cs typeface="Public Sans"/>
-              <a:sym typeface="Public Sans"/>
-            </a:endParaRPr>
-          </a:p>
-        </p:txBody>
-      </p:sp>
-      <p:sp>
-        <p:nvSpPr>
-          <p:cNvPr id="86" name="Google Shape;86;p16"/>
-          <p:cNvSpPr txBox="1"/>
-          <p:nvPr/>
-        </p:nvSpPr>
-        <p:spPr>
-          <a:xfrm>
-            <a:off x="1537363" y="12169900"/>
-            <a:ext cx="5083800" cy="477000"/>
-          </a:xfrm>
-          <a:prstGeom prst="rect">
-            <a:avLst/>
-          </a:prstGeom>
-          <a:noFill/>
-          <a:ln>
-            <a:noFill/>
-          </a:ln>
-        </p:spPr>
-        <p:txBody>
-          <a:bodyPr spcFirstLastPara="1" wrap="square" lIns="91425" tIns="91425" rIns="91425" bIns="91425" anchor="t" anchorCtr="0">
-            <a:spAutoFit/>
-          </a:bodyPr>
-          <a:lstStyle/>
-          <a:p>
-            <a:pPr marL="0" lvl="0" indent="0" algn="l" rtl="0">
-              <a:spcBef>
-                <a:spcPts val="0"/>
-              </a:spcBef>
-              <a:spcAft>
-                <a:spcPts val="0"/>
-              </a:spcAft>
-              <a:buNone/>
-            </a:pPr>
-            <a:r>
-              <a:rPr lang="en" sz="1900" b="1">
-                <a:solidFill>
-                  <a:srgbClr val="434343"/>
-                </a:solidFill>
-                <a:latin typeface="Public Sans"/>
-                <a:ea typeface="Public Sans"/>
-                <a:cs typeface="Public Sans"/>
-                <a:sym typeface="Public Sans"/>
-              </a:rPr>
-              <a:t>&lt;&lt;AE 07&gt;&gt;</a:t>
-            </a:r>
-            <a:endParaRPr sz="1900" b="1">
-              <a:solidFill>
-                <a:srgbClr val="434343"/>
-              </a:solidFill>
-              <a:latin typeface="Public Sans"/>
-              <a:ea typeface="Public Sans"/>
-              <a:cs typeface="Public Sans"/>
-              <a:sym typeface="Public Sans"/>
-            </a:endParaRPr>
-          </a:p>
-        </p:txBody>
-      </p:sp>
-      <p:sp>
-        <p:nvSpPr>
-          <p:cNvPr id="87" name="Google Shape;87;p16"/>
-          <p:cNvSpPr txBox="1"/>
-          <p:nvPr/>
-        </p:nvSpPr>
-        <p:spPr>
-          <a:xfrm>
-            <a:off x="7664530" y="12169900"/>
-            <a:ext cx="1618500" cy="769500"/>
-          </a:xfrm>
-          <a:prstGeom prst="rect">
-            <a:avLst/>
-          </a:prstGeom>
-          <a:noFill/>
-          <a:ln>
-            <a:noFill/>
-          </a:ln>
-        </p:spPr>
-        <p:txBody>
-          <a:bodyPr spcFirstLastPara="1" wrap="square" lIns="91425" tIns="91425" rIns="91425" bIns="91425" anchor="t" anchorCtr="0">
-            <a:spAutoFit/>
-          </a:bodyPr>
-          <a:lstStyle/>
-          <a:p>
-            <a:pPr marL="0" lvl="0" indent="0" algn="l" rtl="0">
-              <a:spcBef>
-                <a:spcPts val="0"/>
-              </a:spcBef>
-              <a:spcAft>
-                <a:spcPts val="0"/>
-              </a:spcAft>
-              <a:buNone/>
-            </a:pPr>
-            <a:r>
-              <a:rPr lang="en" sz="1900" b="1">
-                <a:solidFill>
-                  <a:srgbClr val="434343"/>
-                </a:solidFill>
-                <a:latin typeface="Public Sans"/>
-                <a:ea typeface="Public Sans"/>
-                <a:cs typeface="Public Sans"/>
-                <a:sym typeface="Public Sans"/>
-              </a:rPr>
-              <a:t>&lt;&lt;% AE 07&gt;&gt;</a:t>
-            </a:r>
-            <a:endParaRPr sz="1900" b="1">
-              <a:solidFill>
-                <a:srgbClr val="434343"/>
-              </a:solidFill>
-              <a:latin typeface="Public Sans"/>
-              <a:ea typeface="Public Sans"/>
-              <a:cs typeface="Public Sans"/>
-              <a:sym typeface="Public Sans"/>
-            </a:endParaRPr>
-          </a:p>
-        </p:txBody>
-      </p:sp>
-      <p:sp>
-        <p:nvSpPr>
-          <p:cNvPr id="88" name="Google Shape;88;p16"/>
-          <p:cNvSpPr txBox="1"/>
-          <p:nvPr/>
-        </p:nvSpPr>
-        <p:spPr>
-          <a:xfrm>
-            <a:off x="1537374" y="13864000"/>
-            <a:ext cx="7069200" cy="477000"/>
-          </a:xfrm>
-          <a:prstGeom prst="rect">
-            <a:avLst/>
-          </a:prstGeom>
-          <a:noFill/>
-          <a:ln>
-            <a:noFill/>
-          </a:ln>
-        </p:spPr>
-        <p:txBody>
-          <a:bodyPr spcFirstLastPara="1" wrap="square" lIns="91425" tIns="91425" rIns="91425" bIns="91425" anchor="t" anchorCtr="0">
-            <a:spAutoFit/>
-          </a:bodyPr>
-          <a:lstStyle/>
-          <a:p>
-            <a:pPr marL="0" lvl="0" indent="0" algn="l" rtl="0">
-              <a:spcBef>
-                <a:spcPts val="0"/>
-              </a:spcBef>
-              <a:spcAft>
-                <a:spcPts val="0"/>
-              </a:spcAft>
-              <a:buNone/>
-            </a:pPr>
-            <a:r>
-              <a:rPr lang="en" sz="1900">
-                <a:solidFill>
-                  <a:srgbClr val="434343"/>
-                </a:solidFill>
-                <a:latin typeface="Public Sans"/>
-                <a:ea typeface="Public Sans"/>
-                <a:cs typeface="Public Sans"/>
-                <a:sym typeface="Public Sans"/>
-              </a:rPr>
-              <a:t>&lt;&lt;URL AE 08&gt;&gt;</a:t>
-            </a:r>
-            <a:endParaRPr sz="1900">
-              <a:solidFill>
-                <a:srgbClr val="434343"/>
-              </a:solidFill>
-              <a:latin typeface="Public Sans"/>
-              <a:ea typeface="Public Sans"/>
-              <a:cs typeface="Public Sans"/>
-              <a:sym typeface="Public Sans"/>
-            </a:endParaRPr>
-          </a:p>
-        </p:txBody>
-      </p:sp>
-      <p:sp>
-        <p:nvSpPr>
-          <p:cNvPr id="89" name="Google Shape;89;p16"/>
-          <p:cNvSpPr txBox="1"/>
-          <p:nvPr/>
-        </p:nvSpPr>
-        <p:spPr>
-          <a:xfrm>
-            <a:off x="1537363" y="13345350"/>
-            <a:ext cx="5083800" cy="477000"/>
-          </a:xfrm>
-          <a:prstGeom prst="rect">
-            <a:avLst/>
-          </a:prstGeom>
-          <a:noFill/>
-          <a:ln>
-            <a:noFill/>
-          </a:ln>
-        </p:spPr>
-        <p:txBody>
-          <a:bodyPr spcFirstLastPara="1" wrap="square" lIns="91425" tIns="91425" rIns="91425" bIns="91425" anchor="t" anchorCtr="0">
-            <a:spAutoFit/>
-          </a:bodyPr>
-          <a:lstStyle/>
-          <a:p>
-            <a:pPr marL="0" lvl="0" indent="0" algn="l" rtl="0">
-              <a:spcBef>
-                <a:spcPts val="0"/>
-              </a:spcBef>
-              <a:spcAft>
-                <a:spcPts val="0"/>
-              </a:spcAft>
-              <a:buNone/>
-            </a:pPr>
-            <a:r>
-              <a:rPr lang="en" sz="1900" b="1">
-                <a:solidFill>
-                  <a:srgbClr val="434343"/>
-                </a:solidFill>
-                <a:latin typeface="Public Sans"/>
-                <a:ea typeface="Public Sans"/>
-                <a:cs typeface="Public Sans"/>
-                <a:sym typeface="Public Sans"/>
-              </a:rPr>
-              <a:t>&lt;&lt;AE 08&gt;&gt;</a:t>
-            </a:r>
-            <a:endParaRPr sz="1900" b="1">
-              <a:solidFill>
-                <a:srgbClr val="434343"/>
-              </a:solidFill>
-              <a:latin typeface="Public Sans"/>
-              <a:ea typeface="Public Sans"/>
-              <a:cs typeface="Public Sans"/>
-              <a:sym typeface="Public Sans"/>
-            </a:endParaRPr>
-          </a:p>
-        </p:txBody>
-      </p:sp>
-      <p:sp>
-        <p:nvSpPr>
-          <p:cNvPr id="90" name="Google Shape;90;p16"/>
-          <p:cNvSpPr txBox="1"/>
-          <p:nvPr/>
-        </p:nvSpPr>
-        <p:spPr>
-          <a:xfrm>
-            <a:off x="7664530" y="13345350"/>
-            <a:ext cx="1618500" cy="769500"/>
-          </a:xfrm>
-          <a:prstGeom prst="rect">
-            <a:avLst/>
-          </a:prstGeom>
-          <a:noFill/>
-          <a:ln>
-            <a:noFill/>
-          </a:ln>
-        </p:spPr>
-        <p:txBody>
-          <a:bodyPr spcFirstLastPara="1" wrap="square" lIns="91425" tIns="91425" rIns="91425" bIns="91425" anchor="t" anchorCtr="0">
-            <a:spAutoFit/>
-          </a:bodyPr>
-          <a:lstStyle/>
-          <a:p>
-            <a:pPr marL="0" lvl="0" indent="0" algn="l" rtl="0">
-              <a:spcBef>
-                <a:spcPts val="0"/>
-              </a:spcBef>
-              <a:spcAft>
-                <a:spcPts val="0"/>
-              </a:spcAft>
-              <a:buNone/>
-            </a:pPr>
-            <a:r>
-              <a:rPr lang="en" sz="1900" b="1">
-                <a:solidFill>
-                  <a:srgbClr val="434343"/>
-                </a:solidFill>
-                <a:latin typeface="Public Sans"/>
-                <a:ea typeface="Public Sans"/>
-                <a:cs typeface="Public Sans"/>
-                <a:sym typeface="Public Sans"/>
-              </a:rPr>
-              <a:t>&lt;&lt;% AE 08&gt;&gt;</a:t>
             </a:r>
             <a:endParaRPr sz="1900" b="1">
               <a:solidFill>
@@ -18978,7 +19702,7 @@
     </p:bg>
     <p:spTree>
       <p:nvGrpSpPr>
-        <p:cNvPr id="1" name="Shape 349"/>
+        <p:cNvPr id="1" name="Shape 354"/>
         <p:cNvGrpSpPr/>
         <p:nvPr/>
       </p:nvGrpSpPr>
@@ -19016,7 +19740,7 @@
     </p:bg>
     <p:spTree>
       <p:nvGrpSpPr>
-        <p:cNvPr id="1" name="Shape 353"/>
+        <p:cNvPr id="1" name="Shape 358"/>
         <p:cNvGrpSpPr/>
         <p:nvPr/>
       </p:nvGrpSpPr>
@@ -19054,7 +19778,7 @@
     </p:bg>
     <p:spTree>
       <p:nvGrpSpPr>
-        <p:cNvPr id="1" name="Shape 357"/>
+        <p:cNvPr id="1" name="Shape 362"/>
         <p:cNvGrpSpPr/>
         <p:nvPr/>
       </p:nvGrpSpPr>
@@ -19068,14 +19792,14 @@
       </p:grpSpPr>
       <p:sp>
         <p:nvSpPr>
-          <p:cNvPr id="358" name="Google Shape;358;p54"/>
+          <p:cNvPr id="363" name="Google Shape;363;p55"/>
           <p:cNvSpPr txBox="1"/>
           <p:nvPr/>
         </p:nvSpPr>
         <p:spPr>
           <a:xfrm>
-            <a:off x="3205050" y="11829705"/>
-            <a:ext cx="3876900" cy="720616"/>
+            <a:off x="3205050" y="11860431"/>
+            <a:ext cx="3876900" cy="720900"/>
           </a:xfrm>
           <a:prstGeom prst="rect">
             <a:avLst/>
@@ -19091,28 +19815,44 @@
           </a:bodyPr>
           <a:lstStyle/>
           <a:p>
-            <a:pPr marL="0" lvl="0" indent="0" algn="ctr" rtl="0">
-              <a:spcBef>
-                <a:spcPts val="0"/>
-              </a:spcBef>
-              <a:spcAft>
-                <a:spcPts val="0"/>
-              </a:spcAft>
+            <a:pPr marL="0" marR="0" lvl="0" indent="0" algn="ctr" rtl="0">
+              <a:lnSpc>
+                <a:spcPct val="100000"/>
+              </a:lnSpc>
+              <a:spcBef>
+                <a:spcPts val="0"/>
+              </a:spcBef>
+              <a:spcAft>
+                <a:spcPts val="0"/>
+              </a:spcAft>
+              <a:buClr>
+                <a:srgbClr val="000000"/>
+              </a:buClr>
+              <a:buSzPts val="3483"/>
+              <a:buFont typeface="Arial"/>
               <a:buNone/>
             </a:pPr>
             <a:r>
-              <a:rPr lang="es-AR" sz="3483" b="1" dirty="0">
+              <a:rPr lang="en" sz="3483" b="1" i="0" u="sng" strike="noStrike" cap="none">
                 <a:solidFill>
-                  <a:schemeClr val="tx1"/>
+                  <a:schemeClr val="hlink"/>
                 </a:solidFill>
+                <a:latin typeface="Arial"/>
+                <a:ea typeface="Arial"/>
+                <a:cs typeface="Arial"/>
+                <a:sym typeface="Arial"/>
                 <a:hlinkClick r:id="rId4"/>
               </a:rPr>
               <a:t>Responder</a:t>
             </a:r>
-            <a:endParaRPr lang="es-AR" sz="3483" b="1" dirty="0">
+            <a:endParaRPr sz="3483" b="1" i="0" u="none" strike="noStrike" cap="none">
               <a:solidFill>
-                <a:schemeClr val="tx1"/>
+                <a:schemeClr val="dk1"/>
               </a:solidFill>
+              <a:latin typeface="Arial"/>
+              <a:ea typeface="Arial"/>
+              <a:cs typeface="Arial"/>
+              <a:sym typeface="Arial"/>
             </a:endParaRPr>
           </a:p>
         </p:txBody>
@@ -19143,7 +19883,7 @@
     </p:bg>
     <p:spTree>
       <p:nvGrpSpPr>
-        <p:cNvPr id="1" name="Shape 94"/>
+        <p:cNvPr id="1" name="Shape 92"/>
         <p:cNvGrpSpPr/>
         <p:nvPr/>
       </p:nvGrpSpPr>
@@ -19157,7 +19897,7 @@
       </p:grpSpPr>
       <p:sp>
         <p:nvSpPr>
-          <p:cNvPr id="95" name="Google Shape;95;p17"/>
+          <p:cNvPr id="93" name="Google Shape;93;p18"/>
           <p:cNvSpPr txBox="1"/>
           <p:nvPr/>
         </p:nvSpPr>
@@ -19215,7 +19955,7 @@
       </p:sp>
       <p:sp>
         <p:nvSpPr>
-          <p:cNvPr id="96" name="Google Shape;96;p17"/>
+          <p:cNvPr id="94" name="Google Shape;94;p18"/>
           <p:cNvSpPr txBox="1"/>
           <p:nvPr/>
         </p:nvSpPr>
@@ -19273,7 +20013,7 @@
       </p:sp>
       <p:sp>
         <p:nvSpPr>
-          <p:cNvPr id="97" name="Google Shape;97;p17"/>
+          <p:cNvPr id="95" name="Google Shape;95;p18"/>
           <p:cNvSpPr txBox="1"/>
           <p:nvPr/>
         </p:nvSpPr>
@@ -19331,7 +20071,7 @@
       </p:sp>
       <p:sp>
         <p:nvSpPr>
-          <p:cNvPr id="98" name="Google Shape;98;p17"/>
+          <p:cNvPr id="96" name="Google Shape;96;p18"/>
           <p:cNvSpPr txBox="1"/>
           <p:nvPr/>
         </p:nvSpPr>
@@ -19389,7 +20129,7 @@
       </p:sp>
       <p:sp>
         <p:nvSpPr>
-          <p:cNvPr id="99" name="Google Shape;99;p17"/>
+          <p:cNvPr id="97" name="Google Shape;97;p18"/>
           <p:cNvSpPr txBox="1"/>
           <p:nvPr/>
         </p:nvSpPr>
@@ -19447,7 +20187,7 @@
       </p:sp>
       <p:sp>
         <p:nvSpPr>
-          <p:cNvPr id="100" name="Google Shape;100;p17"/>
+          <p:cNvPr id="98" name="Google Shape;98;p18"/>
           <p:cNvSpPr txBox="1"/>
           <p:nvPr/>
         </p:nvSpPr>
@@ -19505,7 +20245,7 @@
       </p:sp>
       <p:sp>
         <p:nvSpPr>
-          <p:cNvPr id="101" name="Google Shape;101;p17"/>
+          <p:cNvPr id="99" name="Google Shape;99;p18"/>
           <p:cNvSpPr txBox="1"/>
           <p:nvPr/>
         </p:nvSpPr>
@@ -19563,7 +20303,7 @@
       </p:sp>
       <p:sp>
         <p:nvSpPr>
-          <p:cNvPr id="102" name="Google Shape;102;p17"/>
+          <p:cNvPr id="100" name="Google Shape;100;p18"/>
           <p:cNvSpPr txBox="1"/>
           <p:nvPr/>
         </p:nvSpPr>
@@ -19645,7 +20385,7 @@
     </p:bg>
     <p:spTree>
       <p:nvGrpSpPr>
-        <p:cNvPr id="1" name="Shape 106"/>
+        <p:cNvPr id="1" name="Shape 104"/>
         <p:cNvGrpSpPr/>
         <p:nvPr/>
       </p:nvGrpSpPr>
@@ -19683,7 +20423,7 @@
     </p:bg>
     <p:spTree>
       <p:nvGrpSpPr>
-        <p:cNvPr id="1" name="Shape 110"/>
+        <p:cNvPr id="1" name="Shape 108"/>
         <p:cNvGrpSpPr/>
         <p:nvPr/>
       </p:nvGrpSpPr>
@@ -19697,7 +20437,7 @@
       </p:grpSpPr>
       <p:sp>
         <p:nvSpPr>
-          <p:cNvPr id="111" name="Google Shape;111;p19"/>
+          <p:cNvPr id="109" name="Google Shape;109;p20"/>
           <p:cNvSpPr txBox="1"/>
           <p:nvPr/>
         </p:nvSpPr>
@@ -19755,7 +20495,7 @@
       </p:sp>
       <p:sp>
         <p:nvSpPr>
-          <p:cNvPr id="112" name="Google Shape;112;p19"/>
+          <p:cNvPr id="110" name="Google Shape;110;p20"/>
           <p:cNvSpPr txBox="1"/>
           <p:nvPr/>
         </p:nvSpPr>
@@ -19813,7 +20553,7 @@
       </p:sp>
       <p:sp>
         <p:nvSpPr>
-          <p:cNvPr id="113" name="Google Shape;113;p19"/>
+          <p:cNvPr id="111" name="Google Shape;111;p20"/>
           <p:cNvSpPr txBox="1"/>
           <p:nvPr/>
         </p:nvSpPr>
@@ -19874,7 +20614,7 @@
       </p:sp>
       <p:sp>
         <p:nvSpPr>
-          <p:cNvPr id="114" name="Google Shape;114;p19"/>
+          <p:cNvPr id="112" name="Google Shape;112;p20"/>
           <p:cNvSpPr txBox="1"/>
           <p:nvPr/>
         </p:nvSpPr>
@@ -19959,7 +20699,7 @@
     </p:bg>
     <p:spTree>
       <p:nvGrpSpPr>
-        <p:cNvPr id="1" name="Shape 118"/>
+        <p:cNvPr id="1" name="Shape 116"/>
         <p:cNvGrpSpPr/>
         <p:nvPr/>
       </p:nvGrpSpPr>
@@ -19973,7 +20713,7 @@
       </p:grpSpPr>
       <p:sp>
         <p:nvSpPr>
-          <p:cNvPr id="119" name="Google Shape;119;p20"/>
+          <p:cNvPr id="117" name="Google Shape;117;p21"/>
           <p:cNvSpPr txBox="1"/>
           <p:nvPr/>
         </p:nvSpPr>
@@ -20034,7 +20774,7 @@
       </p:sp>
       <p:sp>
         <p:nvSpPr>
-          <p:cNvPr id="120" name="Google Shape;120;p20"/>
+          <p:cNvPr id="118" name="Google Shape;118;p21"/>
           <p:cNvSpPr txBox="1"/>
           <p:nvPr/>
         </p:nvSpPr>
@@ -20092,7 +20832,7 @@
       </p:sp>
       <p:sp>
         <p:nvSpPr>
-          <p:cNvPr id="121" name="Google Shape;121;p20"/>
+          <p:cNvPr id="119" name="Google Shape;119;p21"/>
           <p:cNvSpPr txBox="1"/>
           <p:nvPr/>
         </p:nvSpPr>
@@ -20153,7 +20893,7 @@
       </p:sp>
       <p:sp>
         <p:nvSpPr>
-          <p:cNvPr id="122" name="Google Shape;122;p20"/>
+          <p:cNvPr id="120" name="Google Shape;120;p21"/>
           <p:cNvSpPr txBox="1"/>
           <p:nvPr/>
         </p:nvSpPr>
@@ -20238,7 +20978,7 @@
     </p:bg>
     <p:spTree>
       <p:nvGrpSpPr>
-        <p:cNvPr id="1" name="Shape 126"/>
+        <p:cNvPr id="1" name="Shape 124"/>
         <p:cNvGrpSpPr/>
         <p:nvPr/>
       </p:nvGrpSpPr>
@@ -20252,7 +20992,7 @@
       </p:grpSpPr>
       <p:sp>
         <p:nvSpPr>
-          <p:cNvPr id="127" name="Google Shape;127;p21"/>
+          <p:cNvPr id="125" name="Google Shape;125;p22"/>
           <p:cNvSpPr txBox="1"/>
           <p:nvPr/>
         </p:nvSpPr>
@@ -20310,7 +21050,7 @@
       </p:sp>
       <p:sp>
         <p:nvSpPr>
-          <p:cNvPr id="128" name="Google Shape;128;p21"/>
+          <p:cNvPr id="126" name="Google Shape;126;p22"/>
           <p:cNvSpPr txBox="1"/>
           <p:nvPr/>
         </p:nvSpPr>
@@ -20368,7 +21108,7 @@
       </p:sp>
       <p:sp>
         <p:nvSpPr>
-          <p:cNvPr id="129" name="Google Shape;129;p21"/>
+          <p:cNvPr id="127" name="Google Shape;127;p22"/>
           <p:cNvSpPr txBox="1"/>
           <p:nvPr/>
         </p:nvSpPr>
@@ -20429,7 +21169,7 @@
       </p:sp>
       <p:sp>
         <p:nvSpPr>
-          <p:cNvPr id="130" name="Google Shape;130;p21"/>
+          <p:cNvPr id="128" name="Google Shape;128;p22"/>
           <p:cNvSpPr txBox="1"/>
           <p:nvPr/>
         </p:nvSpPr>

--- a/assets/Template_Autoconocimiento 2.0 (completo).pptx
+++ b/assets/Template_Autoconocimiento 2.0 (completo).pptx
@@ -336,42 +336,113 @@
 </p:presentation>
 </file>
 
+<file path=ppt/revisionInfo.xml><?xml version="1.0" encoding="utf-8"?>
+<p1510:revInfo xmlns:a="http://schemas.openxmlformats.org/drawingml/2006/main" xmlns:r="http://schemas.openxmlformats.org/officeDocument/2006/relationships" xmlns:p1510="http://schemas.microsoft.com/office/powerpoint/2015/10/main">
+  <p1510:revLst>
+    <p1510:client id="{256CCB63-3F68-4741-8120-14FA7492E4EF}" v="1" dt="2026-04-28T16:58:48.901"/>
+  </p1510:revLst>
+</p1510:revInfo>
+</file>
+
 <file path=ppt/changesInfos/changesInfo1.xml><?xml version="1.0" encoding="utf-8"?>
 <pc:chgInfo xmlns:a="http://schemas.openxmlformats.org/drawingml/2006/main" xmlns:r="http://schemas.openxmlformats.org/officeDocument/2006/relationships" xmlns:ac="http://schemas.microsoft.com/office/drawing/2013/main/command" xmlns:pc="http://schemas.microsoft.com/office/powerpoint/2013/main/command">
   <pc:docChgLst>
     <pc:chgData name="juani vila bach" userId="140d79d91c36b714" providerId="LiveId" clId="{681BBBA0-CB6B-4408-8383-25A2ECA50787}"/>
-    <pc:docChg chg="modSld">
-      <pc:chgData name="juani vila bach" userId="140d79d91c36b714" providerId="LiveId" clId="{681BBBA0-CB6B-4408-8383-25A2ECA50787}" dt="2026-03-26T15:07:14.701" v="3" actId="1076"/>
+    <pc:docChg chg="custSel modSld">
+      <pc:chgData name="juani vila bach" userId="140d79d91c36b714" providerId="LiveId" clId="{681BBBA0-CB6B-4408-8383-25A2ECA50787}" dt="2026-04-28T16:59:08.968" v="20" actId="20577"/>
       <pc:docMkLst>
         <pc:docMk/>
       </pc:docMkLst>
-      <pc:sldChg chg="modSp mod">
-        <pc:chgData name="juani vila bach" userId="140d79d91c36b714" providerId="LiveId" clId="{681BBBA0-CB6B-4408-8383-25A2ECA50787}" dt="2026-03-26T15:06:36.793" v="2" actId="20577"/>
+      <pc:sldChg chg="addSp modSp mod modNotes">
+        <pc:chgData name="juani vila bach" userId="140d79d91c36b714" providerId="LiveId" clId="{681BBBA0-CB6B-4408-8383-25A2ECA50787}" dt="2026-04-28T16:59:08.968" v="20" actId="20577"/>
         <pc:sldMkLst>
           <pc:docMk/>
-          <pc:sldMk cId="0" sldId="281"/>
+          <pc:sldMk cId="0" sldId="259"/>
         </pc:sldMkLst>
-        <pc:spChg chg="mod">
-          <ac:chgData name="juani vila bach" userId="140d79d91c36b714" providerId="LiveId" clId="{681BBBA0-CB6B-4408-8383-25A2ECA50787}" dt="2026-03-26T15:06:36.793" v="2" actId="20577"/>
+        <pc:spChg chg="add mod">
+          <ac:chgData name="juani vila bach" userId="140d79d91c36b714" providerId="LiveId" clId="{681BBBA0-CB6B-4408-8383-25A2ECA50787}" dt="2026-04-28T16:58:57.012" v="12" actId="20577"/>
           <ac:spMkLst>
             <pc:docMk/>
-            <pc:sldMk cId="0" sldId="281"/>
-            <ac:spMk id="253" creationId="{00000000-0000-0000-0000-000000000000}"/>
+            <pc:sldMk cId="0" sldId="259"/>
+            <ac:spMk id="2" creationId="{7C2C2B16-6C14-FC15-2B53-AE0B993141CD}"/>
+          </ac:spMkLst>
+        </pc:spChg>
+        <pc:spChg chg="add mod">
+          <ac:chgData name="juani vila bach" userId="140d79d91c36b714" providerId="LiveId" clId="{681BBBA0-CB6B-4408-8383-25A2ECA50787}" dt="2026-04-28T16:58:54.608" v="10" actId="20577"/>
+          <ac:spMkLst>
+            <pc:docMk/>
+            <pc:sldMk cId="0" sldId="259"/>
+            <ac:spMk id="3" creationId="{A887DDC8-097B-5316-2B52-684906DD8A5E}"/>
+          </ac:spMkLst>
+        </pc:spChg>
+        <pc:spChg chg="add mod">
+          <ac:chgData name="juani vila bach" userId="140d79d91c36b714" providerId="LiveId" clId="{681BBBA0-CB6B-4408-8383-25A2ECA50787}" dt="2026-04-28T16:59:01.081" v="14" actId="20577"/>
+          <ac:spMkLst>
+            <pc:docMk/>
+            <pc:sldMk cId="0" sldId="259"/>
+            <ac:spMk id="4" creationId="{F48E01CB-BD26-4367-0D41-82947F291BD2}"/>
+          </ac:spMkLst>
+        </pc:spChg>
+        <pc:spChg chg="add mod">
+          <ac:chgData name="juani vila bach" userId="140d79d91c36b714" providerId="LiveId" clId="{681BBBA0-CB6B-4408-8383-25A2ECA50787}" dt="2026-04-28T16:59:05.684" v="18" actId="20577"/>
+          <ac:spMkLst>
+            <pc:docMk/>
+            <pc:sldMk cId="0" sldId="259"/>
+            <ac:spMk id="5" creationId="{0B44598C-CE0E-F275-4950-EA4383AF51F7}"/>
+          </ac:spMkLst>
+        </pc:spChg>
+        <pc:spChg chg="add mod">
+          <ac:chgData name="juani vila bach" userId="140d79d91c36b714" providerId="LiveId" clId="{681BBBA0-CB6B-4408-8383-25A2ECA50787}" dt="2026-04-28T16:59:03.721" v="16" actId="20577"/>
+          <ac:spMkLst>
+            <pc:docMk/>
+            <pc:sldMk cId="0" sldId="259"/>
+            <ac:spMk id="6" creationId="{DDBF6075-E2EC-1038-754F-45717E528DD2}"/>
+          </ac:spMkLst>
+        </pc:spChg>
+        <pc:spChg chg="add mod">
+          <ac:chgData name="juani vila bach" userId="140d79d91c36b714" providerId="LiveId" clId="{681BBBA0-CB6B-4408-8383-25A2ECA50787}" dt="2026-04-28T16:59:08.968" v="20" actId="20577"/>
+          <ac:spMkLst>
+            <pc:docMk/>
+            <pc:sldMk cId="0" sldId="259"/>
+            <ac:spMk id="7" creationId="{C8DCED19-9066-D5E0-56B4-6849DCAD8088}"/>
           </ac:spMkLst>
         </pc:spChg>
       </pc:sldChg>
       <pc:sldChg chg="modSp mod">
-        <pc:chgData name="juani vila bach" userId="140d79d91c36b714" providerId="LiveId" clId="{681BBBA0-CB6B-4408-8383-25A2ECA50787}" dt="2026-03-26T15:07:14.701" v="3" actId="1076"/>
+        <pc:chgData name="juani vila bach" userId="140d79d91c36b714" providerId="LiveId" clId="{681BBBA0-CB6B-4408-8383-25A2ECA50787}" dt="2026-04-28T16:58:49.013" v="5" actId="27636"/>
         <pc:sldMkLst>
           <pc:docMk/>
-          <pc:sldMk cId="0" sldId="285"/>
+          <pc:sldMk cId="0" sldId="292"/>
         </pc:sldMkLst>
         <pc:spChg chg="mod">
-          <ac:chgData name="juani vila bach" userId="140d79d91c36b714" providerId="LiveId" clId="{681BBBA0-CB6B-4408-8383-25A2ECA50787}" dt="2026-03-26T15:07:14.701" v="3" actId="1076"/>
+          <ac:chgData name="juani vila bach" userId="140d79d91c36b714" providerId="LiveId" clId="{681BBBA0-CB6B-4408-8383-25A2ECA50787}" dt="2026-04-28T16:58:49.013" v="5" actId="27636"/>
           <ac:spMkLst>
             <pc:docMk/>
-            <pc:sldMk cId="0" sldId="285"/>
-            <ac:spMk id="292" creationId="{00000000-0000-0000-0000-000000000000}"/>
+            <pc:sldMk cId="0" sldId="292"/>
+            <ac:spMk id="334" creationId="{00000000-0000-0000-0000-000000000000}"/>
+          </ac:spMkLst>
+        </pc:spChg>
+      </pc:sldChg>
+      <pc:sldChg chg="modSp mod">
+        <pc:chgData name="juani vila bach" userId="140d79d91c36b714" providerId="LiveId" clId="{681BBBA0-CB6B-4408-8383-25A2ECA50787}" dt="2026-04-28T16:58:49.023" v="7" actId="27636"/>
+        <pc:sldMkLst>
+          <pc:docMk/>
+          <pc:sldMk cId="0" sldId="293"/>
+        </pc:sldMkLst>
+        <pc:spChg chg="mod">
+          <ac:chgData name="juani vila bach" userId="140d79d91c36b714" providerId="LiveId" clId="{681BBBA0-CB6B-4408-8383-25A2ECA50787}" dt="2026-04-28T16:58:49.021" v="6" actId="27636"/>
+          <ac:spMkLst>
+            <pc:docMk/>
+            <pc:sldMk cId="0" sldId="293"/>
+            <ac:spMk id="343" creationId="{00000000-0000-0000-0000-000000000000}"/>
+          </ac:spMkLst>
+        </pc:spChg>
+        <pc:spChg chg="mod">
+          <ac:chgData name="juani vila bach" userId="140d79d91c36b714" providerId="LiveId" clId="{681BBBA0-CB6B-4408-8383-25A2ECA50787}" dt="2026-04-28T16:58:49.023" v="7" actId="27636"/>
+          <ac:spMkLst>
+            <pc:docMk/>
+            <pc:sldMk cId="0" sldId="293"/>
+            <ac:spMk id="344" creationId="{00000000-0000-0000-0000-000000000000}"/>
           </ac:spMkLst>
         </pc:spChg>
       </pc:sldChg>
@@ -3970,8 +4041,8 @@
         </p:nvSpPr>
         <p:spPr>
           <a:xfrm>
-            <a:off x="2464919" y="685800"/>
-            <a:ext cx="1928700" cy="3429000"/>
+            <a:off x="2465388" y="685800"/>
+            <a:ext cx="1928812" cy="3429000"/>
           </a:xfrm>
           <a:custGeom>
             <a:avLst/>
@@ -4074,8 +4145,8 @@
         </p:nvSpPr>
         <p:spPr>
           <a:xfrm>
-            <a:off x="2464919" y="685800"/>
-            <a:ext cx="1928700" cy="3429000"/>
+            <a:off x="2465388" y="685800"/>
+            <a:ext cx="1928812" cy="3429000"/>
           </a:xfrm>
           <a:custGeom>
             <a:avLst/>
@@ -4282,8 +4353,8 @@
         </p:nvSpPr>
         <p:spPr>
           <a:xfrm>
-            <a:off x="2464919" y="685800"/>
-            <a:ext cx="1928700" cy="3429000"/>
+            <a:off x="2465388" y="685800"/>
+            <a:ext cx="1928812" cy="3429000"/>
           </a:xfrm>
           <a:custGeom>
             <a:avLst/>
@@ -18010,7 +18081,7 @@
         </p:spPr>
         <p:txBody>
           <a:bodyPr spcFirstLastPara="1" wrap="square" lIns="91425" tIns="91425" rIns="91425" bIns="91425" anchor="t" anchorCtr="0">
-            <a:normAutofit/>
+            <a:normAutofit fontScale="92500" lnSpcReduction="10000"/>
           </a:bodyPr>
           <a:lstStyle/>
           <a:p>
@@ -18283,7 +18354,7 @@
         </p:spPr>
         <p:txBody>
           <a:bodyPr spcFirstLastPara="1" wrap="square" lIns="91425" tIns="91425" rIns="91425" bIns="91425" anchor="t" anchorCtr="0">
-            <a:normAutofit/>
+            <a:normAutofit fontScale="92500" lnSpcReduction="10000"/>
           </a:bodyPr>
           <a:lstStyle/>
           <a:p>
@@ -18344,7 +18415,7 @@
         </p:spPr>
         <p:txBody>
           <a:bodyPr spcFirstLastPara="1" wrap="square" lIns="91425" tIns="91425" rIns="91425" bIns="91425" anchor="t" anchorCtr="0">
-            <a:normAutofit/>
+            <a:normAutofit fontScale="92500" lnSpcReduction="10000"/>
           </a:bodyPr>
           <a:lstStyle/>
           <a:p>
@@ -19665,6 +19736,390 @@
               <a:t>&lt;&lt;% AE 06&gt;&gt;</a:t>
             </a:r>
             <a:endParaRPr sz="1900" b="1">
+              <a:solidFill>
+                <a:srgbClr val="434343"/>
+              </a:solidFill>
+              <a:latin typeface="Public Sans"/>
+              <a:ea typeface="Public Sans"/>
+              <a:cs typeface="Public Sans"/>
+              <a:sym typeface="Public Sans"/>
+            </a:endParaRPr>
+          </a:p>
+        </p:txBody>
+      </p:sp>
+      <p:sp>
+        <p:nvSpPr>
+          <p:cNvPr id="2" name="Google Shape;83;p17">
+            <a:extLst>
+              <a:ext uri="{FF2B5EF4-FFF2-40B4-BE49-F238E27FC236}">
+                <a16:creationId xmlns:a16="http://schemas.microsoft.com/office/drawing/2014/main" id="{7C2C2B16-6C14-FC15-2B53-AE0B993141CD}"/>
+              </a:ext>
+            </a:extLst>
+          </p:cNvPr>
+          <p:cNvSpPr txBox="1"/>
+          <p:nvPr/>
+        </p:nvSpPr>
+        <p:spPr>
+          <a:xfrm>
+            <a:off x="1537374" y="12814441"/>
+            <a:ext cx="7069200" cy="477000"/>
+          </a:xfrm>
+          <a:prstGeom prst="rect">
+            <a:avLst/>
+          </a:prstGeom>
+          <a:noFill/>
+          <a:ln>
+            <a:noFill/>
+          </a:ln>
+        </p:spPr>
+        <p:txBody>
+          <a:bodyPr spcFirstLastPara="1" wrap="square" lIns="91425" tIns="91425" rIns="91425" bIns="91425" anchor="t" anchorCtr="0">
+            <a:spAutoFit/>
+          </a:bodyPr>
+          <a:lstStyle/>
+          <a:p>
+            <a:pPr marL="0" lvl="0" indent="0" algn="l" rtl="0">
+              <a:spcBef>
+                <a:spcPts val="0"/>
+              </a:spcBef>
+              <a:spcAft>
+                <a:spcPts val="0"/>
+              </a:spcAft>
+              <a:buNone/>
+            </a:pPr>
+            <a:r>
+              <a:rPr lang="en" sz="1900" dirty="0">
+                <a:solidFill>
+                  <a:srgbClr val="434343"/>
+                </a:solidFill>
+                <a:latin typeface="Public Sans"/>
+                <a:ea typeface="Public Sans"/>
+                <a:cs typeface="Public Sans"/>
+                <a:sym typeface="Public Sans"/>
+              </a:rPr>
+              <a:t>&lt;&lt;URL AE 07&gt;&gt;</a:t>
+            </a:r>
+            <a:endParaRPr sz="1900" dirty="0">
+              <a:solidFill>
+                <a:srgbClr val="434343"/>
+              </a:solidFill>
+              <a:latin typeface="Public Sans"/>
+              <a:ea typeface="Public Sans"/>
+              <a:cs typeface="Public Sans"/>
+              <a:sym typeface="Public Sans"/>
+            </a:endParaRPr>
+          </a:p>
+        </p:txBody>
+      </p:sp>
+      <p:sp>
+        <p:nvSpPr>
+          <p:cNvPr id="3" name="Google Shape;84;p17">
+            <a:extLst>
+              <a:ext uri="{FF2B5EF4-FFF2-40B4-BE49-F238E27FC236}">
+                <a16:creationId xmlns:a16="http://schemas.microsoft.com/office/drawing/2014/main" id="{A887DDC8-097B-5316-2B52-684906DD8A5E}"/>
+              </a:ext>
+            </a:extLst>
+          </p:cNvPr>
+          <p:cNvSpPr txBox="1"/>
+          <p:nvPr/>
+        </p:nvSpPr>
+        <p:spPr>
+          <a:xfrm>
+            <a:off x="1537363" y="12295791"/>
+            <a:ext cx="5083800" cy="477000"/>
+          </a:xfrm>
+          <a:prstGeom prst="rect">
+            <a:avLst/>
+          </a:prstGeom>
+          <a:noFill/>
+          <a:ln>
+            <a:noFill/>
+          </a:ln>
+        </p:spPr>
+        <p:txBody>
+          <a:bodyPr spcFirstLastPara="1" wrap="square" lIns="91425" tIns="91425" rIns="91425" bIns="91425" anchor="t" anchorCtr="0">
+            <a:spAutoFit/>
+          </a:bodyPr>
+          <a:lstStyle/>
+          <a:p>
+            <a:pPr marL="0" lvl="0" indent="0" algn="l" rtl="0">
+              <a:spcBef>
+                <a:spcPts val="0"/>
+              </a:spcBef>
+              <a:spcAft>
+                <a:spcPts val="0"/>
+              </a:spcAft>
+              <a:buNone/>
+            </a:pPr>
+            <a:r>
+              <a:rPr lang="en" sz="1900" b="1" dirty="0">
+                <a:solidFill>
+                  <a:srgbClr val="434343"/>
+                </a:solidFill>
+                <a:latin typeface="Public Sans"/>
+                <a:ea typeface="Public Sans"/>
+                <a:cs typeface="Public Sans"/>
+                <a:sym typeface="Public Sans"/>
+              </a:rPr>
+              <a:t>&lt;&lt;AE 07&gt;&gt;</a:t>
+            </a:r>
+            <a:endParaRPr sz="1900" b="1" dirty="0">
+              <a:solidFill>
+                <a:srgbClr val="434343"/>
+              </a:solidFill>
+              <a:latin typeface="Public Sans"/>
+              <a:ea typeface="Public Sans"/>
+              <a:cs typeface="Public Sans"/>
+              <a:sym typeface="Public Sans"/>
+            </a:endParaRPr>
+          </a:p>
+        </p:txBody>
+      </p:sp>
+      <p:sp>
+        <p:nvSpPr>
+          <p:cNvPr id="4" name="Google Shape;85;p17">
+            <a:extLst>
+              <a:ext uri="{FF2B5EF4-FFF2-40B4-BE49-F238E27FC236}">
+                <a16:creationId xmlns:a16="http://schemas.microsoft.com/office/drawing/2014/main" id="{F48E01CB-BD26-4367-0D41-82947F291BD2}"/>
+              </a:ext>
+            </a:extLst>
+          </p:cNvPr>
+          <p:cNvSpPr txBox="1"/>
+          <p:nvPr/>
+        </p:nvSpPr>
+        <p:spPr>
+          <a:xfrm>
+            <a:off x="7664530" y="12295791"/>
+            <a:ext cx="1618500" cy="769411"/>
+          </a:xfrm>
+          <a:prstGeom prst="rect">
+            <a:avLst/>
+          </a:prstGeom>
+          <a:noFill/>
+          <a:ln>
+            <a:noFill/>
+          </a:ln>
+        </p:spPr>
+        <p:txBody>
+          <a:bodyPr spcFirstLastPara="1" wrap="square" lIns="91425" tIns="91425" rIns="91425" bIns="91425" anchor="t" anchorCtr="0">
+            <a:spAutoFit/>
+          </a:bodyPr>
+          <a:lstStyle/>
+          <a:p>
+            <a:pPr marL="0" lvl="0" indent="0" algn="l" rtl="0">
+              <a:spcBef>
+                <a:spcPts val="0"/>
+              </a:spcBef>
+              <a:spcAft>
+                <a:spcPts val="0"/>
+              </a:spcAft>
+              <a:buNone/>
+            </a:pPr>
+            <a:r>
+              <a:rPr lang="en" sz="1900" b="1" dirty="0">
+                <a:solidFill>
+                  <a:srgbClr val="434343"/>
+                </a:solidFill>
+                <a:latin typeface="Public Sans"/>
+                <a:ea typeface="Public Sans"/>
+                <a:cs typeface="Public Sans"/>
+                <a:sym typeface="Public Sans"/>
+              </a:rPr>
+              <a:t>&lt;&lt;% AE 07&gt;&gt;</a:t>
+            </a:r>
+            <a:endParaRPr sz="1900" b="1" dirty="0">
+              <a:solidFill>
+                <a:srgbClr val="434343"/>
+              </a:solidFill>
+              <a:latin typeface="Public Sans"/>
+              <a:ea typeface="Public Sans"/>
+              <a:cs typeface="Public Sans"/>
+              <a:sym typeface="Public Sans"/>
+            </a:endParaRPr>
+          </a:p>
+        </p:txBody>
+      </p:sp>
+      <p:sp>
+        <p:nvSpPr>
+          <p:cNvPr id="5" name="Google Shape;86;p17">
+            <a:extLst>
+              <a:ext uri="{FF2B5EF4-FFF2-40B4-BE49-F238E27FC236}">
+                <a16:creationId xmlns:a16="http://schemas.microsoft.com/office/drawing/2014/main" id="{0B44598C-CE0E-F275-4950-EA4383AF51F7}"/>
+              </a:ext>
+            </a:extLst>
+          </p:cNvPr>
+          <p:cNvSpPr txBox="1"/>
+          <p:nvPr/>
+        </p:nvSpPr>
+        <p:spPr>
+          <a:xfrm>
+            <a:off x="1537374" y="13989891"/>
+            <a:ext cx="7069200" cy="477000"/>
+          </a:xfrm>
+          <a:prstGeom prst="rect">
+            <a:avLst/>
+          </a:prstGeom>
+          <a:noFill/>
+          <a:ln>
+            <a:noFill/>
+          </a:ln>
+        </p:spPr>
+        <p:txBody>
+          <a:bodyPr spcFirstLastPara="1" wrap="square" lIns="91425" tIns="91425" rIns="91425" bIns="91425" anchor="t" anchorCtr="0">
+            <a:spAutoFit/>
+          </a:bodyPr>
+          <a:lstStyle/>
+          <a:p>
+            <a:pPr marL="0" lvl="0" indent="0" algn="l" rtl="0">
+              <a:spcBef>
+                <a:spcPts val="0"/>
+              </a:spcBef>
+              <a:spcAft>
+                <a:spcPts val="0"/>
+              </a:spcAft>
+              <a:buNone/>
+            </a:pPr>
+            <a:r>
+              <a:rPr lang="en" sz="1900" dirty="0">
+                <a:solidFill>
+                  <a:srgbClr val="434343"/>
+                </a:solidFill>
+                <a:latin typeface="Public Sans"/>
+                <a:ea typeface="Public Sans"/>
+                <a:cs typeface="Public Sans"/>
+                <a:sym typeface="Public Sans"/>
+              </a:rPr>
+              <a:t>&lt;&lt;URL AE 08&gt;&gt;</a:t>
+            </a:r>
+            <a:endParaRPr sz="1900" dirty="0">
+              <a:solidFill>
+                <a:srgbClr val="434343"/>
+              </a:solidFill>
+              <a:latin typeface="Public Sans"/>
+              <a:ea typeface="Public Sans"/>
+              <a:cs typeface="Public Sans"/>
+              <a:sym typeface="Public Sans"/>
+            </a:endParaRPr>
+          </a:p>
+        </p:txBody>
+      </p:sp>
+      <p:sp>
+        <p:nvSpPr>
+          <p:cNvPr id="6" name="Google Shape;87;p17">
+            <a:extLst>
+              <a:ext uri="{FF2B5EF4-FFF2-40B4-BE49-F238E27FC236}">
+                <a16:creationId xmlns:a16="http://schemas.microsoft.com/office/drawing/2014/main" id="{DDBF6075-E2EC-1038-754F-45717E528DD2}"/>
+              </a:ext>
+            </a:extLst>
+          </p:cNvPr>
+          <p:cNvSpPr txBox="1"/>
+          <p:nvPr/>
+        </p:nvSpPr>
+        <p:spPr>
+          <a:xfrm>
+            <a:off x="1537363" y="13471241"/>
+            <a:ext cx="5083800" cy="477000"/>
+          </a:xfrm>
+          <a:prstGeom prst="rect">
+            <a:avLst/>
+          </a:prstGeom>
+          <a:noFill/>
+          <a:ln>
+            <a:noFill/>
+          </a:ln>
+        </p:spPr>
+        <p:txBody>
+          <a:bodyPr spcFirstLastPara="1" wrap="square" lIns="91425" tIns="91425" rIns="91425" bIns="91425" anchor="t" anchorCtr="0">
+            <a:spAutoFit/>
+          </a:bodyPr>
+          <a:lstStyle/>
+          <a:p>
+            <a:pPr marL="0" lvl="0" indent="0" algn="l" rtl="0">
+              <a:spcBef>
+                <a:spcPts val="0"/>
+              </a:spcBef>
+              <a:spcAft>
+                <a:spcPts val="0"/>
+              </a:spcAft>
+              <a:buNone/>
+            </a:pPr>
+            <a:r>
+              <a:rPr lang="en" sz="1900" b="1" dirty="0">
+                <a:solidFill>
+                  <a:srgbClr val="434343"/>
+                </a:solidFill>
+                <a:latin typeface="Public Sans"/>
+                <a:ea typeface="Public Sans"/>
+                <a:cs typeface="Public Sans"/>
+                <a:sym typeface="Public Sans"/>
+              </a:rPr>
+              <a:t>&lt;&lt;AE 08&gt;&gt;</a:t>
+            </a:r>
+            <a:endParaRPr sz="1900" b="1" dirty="0">
+              <a:solidFill>
+                <a:srgbClr val="434343"/>
+              </a:solidFill>
+              <a:latin typeface="Public Sans"/>
+              <a:ea typeface="Public Sans"/>
+              <a:cs typeface="Public Sans"/>
+              <a:sym typeface="Public Sans"/>
+            </a:endParaRPr>
+          </a:p>
+        </p:txBody>
+      </p:sp>
+      <p:sp>
+        <p:nvSpPr>
+          <p:cNvPr id="7" name="Google Shape;88;p17">
+            <a:extLst>
+              <a:ext uri="{FF2B5EF4-FFF2-40B4-BE49-F238E27FC236}">
+                <a16:creationId xmlns:a16="http://schemas.microsoft.com/office/drawing/2014/main" id="{C8DCED19-9066-D5E0-56B4-6849DCAD8088}"/>
+              </a:ext>
+            </a:extLst>
+          </p:cNvPr>
+          <p:cNvSpPr txBox="1"/>
+          <p:nvPr/>
+        </p:nvSpPr>
+        <p:spPr>
+          <a:xfrm>
+            <a:off x="7664530" y="13471241"/>
+            <a:ext cx="1618500" cy="769411"/>
+          </a:xfrm>
+          <a:prstGeom prst="rect">
+            <a:avLst/>
+          </a:prstGeom>
+          <a:noFill/>
+          <a:ln>
+            <a:noFill/>
+          </a:ln>
+        </p:spPr>
+        <p:txBody>
+          <a:bodyPr spcFirstLastPara="1" wrap="square" lIns="91425" tIns="91425" rIns="91425" bIns="91425" anchor="t" anchorCtr="0">
+            <a:spAutoFit/>
+          </a:bodyPr>
+          <a:lstStyle/>
+          <a:p>
+            <a:pPr marL="0" lvl="0" indent="0" algn="l" rtl="0">
+              <a:spcBef>
+                <a:spcPts val="0"/>
+              </a:spcBef>
+              <a:spcAft>
+                <a:spcPts val="0"/>
+              </a:spcAft>
+              <a:buNone/>
+            </a:pPr>
+            <a:r>
+              <a:rPr lang="en" sz="1900" b="1" dirty="0">
+                <a:solidFill>
+                  <a:srgbClr val="434343"/>
+                </a:solidFill>
+                <a:latin typeface="Public Sans"/>
+                <a:ea typeface="Public Sans"/>
+                <a:cs typeface="Public Sans"/>
+                <a:sym typeface="Public Sans"/>
+              </a:rPr>
+              <a:t>&lt;&lt;% AE 08&gt;&gt;</a:t>
+            </a:r>
+            <a:endParaRPr sz="1900" b="1" dirty="0">
               <a:solidFill>
                 <a:srgbClr val="434343"/>
               </a:solidFill>
